--- a/Unidad 2/pendulo_fam.pptx
+++ b/Unidad 2/pendulo_fam.pptx
@@ -4,6 +4,9 @@
   <p:sldMasterIdLst>
     <p:sldMasterId id="2147483648" r:id="rId1"/>
   </p:sldMasterIdLst>
+  <p:notesMasterIdLst>
+    <p:notesMasterId r:id="rId14"/>
+  </p:notesMasterIdLst>
   <p:sldIdLst>
     <p:sldId id="256" r:id="rId2"/>
     <p:sldId id="257" r:id="rId3"/>
@@ -18,10 +21,7 @@
     <p:sldId id="266" r:id="rId12"/>
     <p:sldId id="267" r:id="rId13"/>
   </p:sldIdLst>
-  <p:notesMasterIdLst>
-    <p:notesMasterId r:id="rId14"/>
-  </p:notesMasterIdLst>
-  <p:sldSz cx="9144000" cy="5143500"/>
+  <p:sldSz cx="9144000" cy="5143500" type="screen16x9"/>
   <p:notesSz cx="5143500" cy="9144000"/>
   <p:defaultTextStyle>
     <a:lvl1pPr marL="0" algn="l" defTabSz="914400" rtl="0" eaLnBrk="1" latinLnBrk="0" hangingPunct="1">
@@ -115,6 +115,11 @@
       </a:defRPr>
     </a:lvl9pPr>
   </p:defaultTextStyle>
+  <p:extLst>
+    <p:ext uri="{EFAFB233-063F-42B5-8137-9DF3F51BA10A}">
+      <p15:sldGuideLst xmlns:p15="http://schemas.microsoft.com/office/powerpoint/2012/main"/>
+    </p:ext>
+  </p:extLst>
 </p:presentation>
 </file>
 
@@ -140,234 +145,10 @@
           <a:chExt cx="0" cy="0"/>
         </a:xfrm>
       </p:grpSpPr>
-      <p:sp>
-        <p:nvSpPr>
-          <p:cNvPr id="2" name="Header Placeholder 1"/>
-          <p:cNvSpPr>
-            <a:spLocks noGrp="1"/>
-          </p:cNvSpPr>
-          <p:nvPr>
-            <p:ph type="hdr" sz="quarter"/>
-          </p:nvPr>
-        </p:nvSpPr>
-        <p:spPr>
-          <a:xfrm>
-            <a:off x="0" y="0"/>
-            <a:ext cx="2971800" cy="458788"/>
-          </a:xfrm>
-          <a:prstGeom prst="rect">
-            <a:avLst/>
-          </a:prstGeom>
-        </p:spPr>
-        <p:txBody>
-          <a:bodyPr vert="horz" lIns="91440" tIns="45720" rIns="91440" bIns="45720" rtlCol="0"/>
-          <a:lstStyle>
-            <a:lvl1pPr algn="l">
-              <a:defRPr sz="1200"/>
-            </a:lvl1pPr>
-          </a:lstStyle>
-          <a:p>
-            <a:endParaRPr lang="en-US"/>
-          </a:p>
-        </p:txBody>
-      </p:sp>
-      <p:sp>
-        <p:nvSpPr>
-          <p:cNvPr id="3" name="Date Placeholder 2"/>
-          <p:cNvSpPr>
-            <a:spLocks noGrp="1"/>
-          </p:cNvSpPr>
-          <p:nvPr>
-            <p:ph type="dt" idx="1"/>
-          </p:nvPr>
-        </p:nvSpPr>
-        <p:spPr>
-          <a:xfrm>
-            <a:off x="3884613" y="0"/>
-            <a:ext cx="2971800" cy="458788"/>
-          </a:xfrm>
-          <a:prstGeom prst="rect">
-            <a:avLst/>
-          </a:prstGeom>
-        </p:spPr>
-        <p:txBody>
-          <a:bodyPr vert="horz" lIns="91440" tIns="45720" rIns="91440" bIns="45720" rtlCol="0"/>
-          <a:lstStyle>
-            <a:lvl1pPr algn="r">
-              <a:defRPr sz="1200"/>
-            </a:lvl1pPr>
-          </a:lstStyle>
-          <a:p>
-            <a:fld id="{5282F153-3F37-0F45-9E97-73ACFA13230C}" type="datetimeFigureOut">
-              <a:rPr lang="en-US"/>
-              <a:t>7/23/19</a:t>
-            </a:fld>
-            <a:endParaRPr lang="en-US"/>
-          </a:p>
-        </p:txBody>
-      </p:sp>
-      <p:sp>
-        <p:nvSpPr>
-          <p:cNvPr id="4" name="Slide Image Placeholder 3"/>
-          <p:cNvSpPr>
-            <a:spLocks noGrp="1" noRot="1" noChangeAspect="1"/>
-          </p:cNvSpPr>
-          <p:nvPr>
-            <p:ph type="sldImg" idx="2"/>
-          </p:nvPr>
-        </p:nvSpPr>
-        <p:spPr>
-          <a:xfrm>
-            <a:off x="685800" y="1143000"/>
-            <a:ext cx="5486400" cy="3086100"/>
-          </a:xfrm>
-          <a:prstGeom prst="rect">
-            <a:avLst/>
-          </a:prstGeom>
-          <a:noFill/>
-          <a:ln w="12700">
-            <a:solidFill>
-              <a:prstClr val="black"/>
-            </a:solidFill>
-          </a:ln>
-        </p:spPr>
-        <p:txBody>
-          <a:bodyPr vert="horz" lIns="91440" tIns="45720" rIns="91440" bIns="45720" rtlCol="0" anchor="ctr"/>
-          <a:lstStyle/>
-          <a:p>
-            <a:endParaRPr lang="en-US"/>
-          </a:p>
-        </p:txBody>
-      </p:sp>
-      <p:sp>
-        <p:nvSpPr>
-          <p:cNvPr id="5" name="Notes Placeholder 4"/>
-          <p:cNvSpPr>
-            <a:spLocks noGrp="1"/>
-          </p:cNvSpPr>
-          <p:nvPr>
-            <p:ph type="body" sz="quarter" idx="3"/>
-          </p:nvPr>
-        </p:nvSpPr>
-        <p:spPr>
-          <a:xfrm>
-            <a:off x="685800" y="4400550"/>
-            <a:ext cx="5486400" cy="3600450"/>
-          </a:xfrm>
-          <a:prstGeom prst="rect">
-            <a:avLst/>
-          </a:prstGeom>
-        </p:spPr>
-        <p:txBody>
-          <a:bodyPr vert="horz" lIns="91440" tIns="45720" rIns="91440" bIns="45720" rtlCol="0"/>
-          <a:lstStyle/>
-          <a:p>
-            <a:pPr lvl="0"/>
-            <a:r>
-              <a:rPr lang="en-US"/>
-              <a:t>Click to edit Master text styles</a:t>
-            </a:r>
-          </a:p>
-          <a:p>
-            <a:pPr lvl="1"/>
-            <a:r>
-              <a:rPr lang="en-US"/>
-              <a:t>Second level</a:t>
-            </a:r>
-          </a:p>
-          <a:p>
-            <a:pPr lvl="2"/>
-            <a:r>
-              <a:rPr lang="en-US"/>
-              <a:t>Third level</a:t>
-            </a:r>
-          </a:p>
-          <a:p>
-            <a:pPr lvl="3"/>
-            <a:r>
-              <a:rPr lang="en-US"/>
-              <a:t>Fourth level</a:t>
-            </a:r>
-          </a:p>
-          <a:p>
-            <a:pPr lvl="4"/>
-            <a:r>
-              <a:rPr lang="en-US"/>
-              <a:t>Fifth level</a:t>
-            </a:r>
-          </a:p>
-        </p:txBody>
-      </p:sp>
-      <p:sp>
-        <p:nvSpPr>
-          <p:cNvPr id="6" name="Footer Placeholder 5"/>
-          <p:cNvSpPr>
-            <a:spLocks noGrp="1"/>
-          </p:cNvSpPr>
-          <p:nvPr>
-            <p:ph type="ftr" sz="quarter" idx="4"/>
-          </p:nvPr>
-        </p:nvSpPr>
-        <p:spPr>
-          <a:xfrm>
-            <a:off x="0" y="8685213"/>
-            <a:ext cx="2971800" cy="458787"/>
-          </a:xfrm>
-          <a:prstGeom prst="rect">
-            <a:avLst/>
-          </a:prstGeom>
-        </p:spPr>
-        <p:txBody>
-          <a:bodyPr vert="horz" lIns="91440" tIns="45720" rIns="91440" bIns="45720" rtlCol="0" anchor="b"/>
-          <a:lstStyle>
-            <a:lvl1pPr algn="l">
-              <a:defRPr sz="1200"/>
-            </a:lvl1pPr>
-          </a:lstStyle>
-          <a:p>
-            <a:endParaRPr lang="en-US"/>
-          </a:p>
-        </p:txBody>
-      </p:sp>
-      <p:sp>
-        <p:nvSpPr>
-          <p:cNvPr id="7" name="Slide Number Placeholder 6"/>
-          <p:cNvSpPr>
-            <a:spLocks noGrp="1"/>
-          </p:cNvSpPr>
-          <p:nvPr>
-            <p:ph type="sldNum" sz="quarter" idx="5"/>
-          </p:nvPr>
-        </p:nvSpPr>
-        <p:spPr>
-          <a:xfrm>
-            <a:off x="3884613" y="8685213"/>
-            <a:ext cx="2971800" cy="458787"/>
-          </a:xfrm>
-          <a:prstGeom prst="rect">
-            <a:avLst/>
-          </a:prstGeom>
-        </p:spPr>
-        <p:txBody>
-          <a:bodyPr vert="horz" lIns="91440" tIns="45720" rIns="91440" bIns="45720" rtlCol="0" anchor="b"/>
-          <a:lstStyle>
-            <a:lvl1pPr algn="r">
-              <a:defRPr sz="1200"/>
-            </a:lvl1pPr>
-          </a:lstStyle>
-          <a:p>
-            <a:fld id="{CE5E9CC1-C706-0F49-92D6-E571CC5EEA8F}" type="slidenum">
-              <a:rPr lang="en-US"/>
-              <a:t>‹#›</a:t>
-            </a:fld>
-            <a:endParaRPr lang="en-US"/>
-          </a:p>
-        </p:txBody>
-      </p:sp>
     </p:spTree>
     <p:extLst>
       <p:ext uri="{BB962C8B-B14F-4D97-AF65-F5344CB8AC3E}">
-        <p14:creationId xmlns:p14="http://schemas.microsoft.com/office/powerpoint/2010/main" val="1024086991"/>
+        <p14:creationId xmlns:p14="http://schemas.microsoft.com/office/powerpoint/2010/main" val="3918673865"/>
       </p:ext>
     </p:extLst>
   </p:cSld>
@@ -511,10 +292,6 @@
           <a:bodyPr/>
           <a:lstStyle/>
           <a:p>
-            <a:r>
-              <a:rPr lang="en-US" dirty="0"/>
-              <a:t/>
-            </a:r>
             <a:endParaRPr lang="en-US" dirty="0"/>
           </a:p>
         </p:txBody>
@@ -599,10 +376,6 @@
           <a:bodyPr/>
           <a:lstStyle/>
           <a:p>
-            <a:r>
-              <a:rPr lang="en-US" dirty="0"/>
-              <a:t/>
-            </a:r>
             <a:endParaRPr lang="en-US" dirty="0"/>
           </a:p>
         </p:txBody>
@@ -687,10 +460,6 @@
           <a:bodyPr/>
           <a:lstStyle/>
           <a:p>
-            <a:r>
-              <a:rPr lang="en-US" dirty="0"/>
-              <a:t/>
-            </a:r>
             <a:endParaRPr lang="en-US" dirty="0"/>
           </a:p>
         </p:txBody>
@@ -775,10 +544,6 @@
           <a:bodyPr/>
           <a:lstStyle/>
           <a:p>
-            <a:r>
-              <a:rPr lang="en-US" dirty="0"/>
-              <a:t/>
-            </a:r>
             <a:endParaRPr lang="en-US" dirty="0"/>
           </a:p>
         </p:txBody>
@@ -863,10 +628,6 @@
           <a:bodyPr/>
           <a:lstStyle/>
           <a:p>
-            <a:r>
-              <a:rPr lang="en-US" dirty="0"/>
-              <a:t/>
-            </a:r>
             <a:endParaRPr lang="en-US" dirty="0"/>
           </a:p>
         </p:txBody>
@@ -951,10 +712,6 @@
           <a:bodyPr/>
           <a:lstStyle/>
           <a:p>
-            <a:r>
-              <a:rPr lang="en-US" dirty="0"/>
-              <a:t/>
-            </a:r>
             <a:endParaRPr lang="en-US" dirty="0"/>
           </a:p>
         </p:txBody>
@@ -1039,10 +796,6 @@
           <a:bodyPr/>
           <a:lstStyle/>
           <a:p>
-            <a:r>
-              <a:rPr lang="en-US" dirty="0"/>
-              <a:t/>
-            </a:r>
             <a:endParaRPr lang="en-US" dirty="0"/>
           </a:p>
         </p:txBody>
@@ -1127,10 +880,6 @@
           <a:bodyPr/>
           <a:lstStyle/>
           <a:p>
-            <a:r>
-              <a:rPr lang="en-US" dirty="0"/>
-              <a:t/>
-            </a:r>
             <a:endParaRPr lang="en-US" dirty="0"/>
           </a:p>
         </p:txBody>
@@ -1215,10 +964,6 @@
           <a:bodyPr/>
           <a:lstStyle/>
           <a:p>
-            <a:r>
-              <a:rPr lang="en-US" dirty="0"/>
-              <a:t/>
-            </a:r>
             <a:endParaRPr lang="en-US" dirty="0"/>
           </a:p>
         </p:txBody>
@@ -1303,10 +1048,6 @@
           <a:bodyPr/>
           <a:lstStyle/>
           <a:p>
-            <a:r>
-              <a:rPr lang="en-US" dirty="0"/>
-              <a:t/>
-            </a:r>
             <a:endParaRPr lang="en-US" dirty="0"/>
           </a:p>
         </p:txBody>
@@ -1391,10 +1132,6 @@
           <a:bodyPr/>
           <a:lstStyle/>
           <a:p>
-            <a:r>
-              <a:rPr lang="en-US" dirty="0"/>
-              <a:t/>
-            </a:r>
             <a:endParaRPr lang="en-US" dirty="0"/>
           </a:p>
         </p:txBody>
@@ -1479,10 +1216,6 @@
           <a:bodyPr/>
           <a:lstStyle/>
           <a:p>
-            <a:r>
-              <a:rPr lang="en-US" dirty="0"/>
-              <a:t/>
-            </a:r>
             <a:endParaRPr lang="en-US" dirty="0"/>
           </a:p>
         </p:txBody>
@@ -1556,6 +1289,11 @@
 <file path=ppt/slideMasters/slideMaster1.xml><?xml version="1.0" encoding="utf-8"?>
 <p:sldMaster xmlns:a="http://schemas.openxmlformats.org/drawingml/2006/main" xmlns:r="http://schemas.openxmlformats.org/officeDocument/2006/relationships" xmlns:p="http://schemas.openxmlformats.org/presentationml/2006/main">
   <p:cSld>
+    <p:bg>
+      <p:bgRef idx="1001">
+        <a:schemeClr val="bg1"/>
+      </p:bgRef>
+    </p:bg>
     <p:spTree>
       <p:nvGrpSpPr>
         <p:cNvPr id="1" name=""/>
@@ -1838,6 +1576,7 @@
         <a:solidFill>
           <a:srgbClr val="0B0F1A"/>
         </a:solidFill>
+        <a:effectLst/>
       </p:bgPr>
     </p:bg>
     <p:spTree>
@@ -1915,7 +1654,7 @@
           <a:bodyPr wrap="square" rtlCol="0" anchor="ctr"/>
           <a:lstStyle/>
           <a:p>
-            <a:pPr indent="0" marL="0">
+            <a:pPr marL="0" indent="0">
               <a:buNone/>
             </a:pPr>
             <a:r>
@@ -1954,7 +1693,7 @@
           <a:bodyPr wrap="square" rtlCol="0" anchor="ctr"/>
           <a:lstStyle/>
           <a:p>
-            <a:pPr indent="0" marL="0">
+            <a:pPr marL="0" indent="0">
               <a:buNone/>
             </a:pPr>
             <a:r>
@@ -1993,7 +1732,7 @@
           <a:bodyPr wrap="square" rtlCol="0" anchor="ctr"/>
           <a:lstStyle/>
           <a:p>
-            <a:pPr indent="0" marL="0">
+            <a:pPr marL="0" indent="0">
               <a:buNone/>
             </a:pPr>
             <a:r>
@@ -2052,7 +1791,7 @@
           <a:bodyPr wrap="square" rtlCol="0" anchor="ctr"/>
           <a:lstStyle/>
           <a:p>
-            <a:pPr indent="0" marL="0">
+            <a:pPr marL="0" indent="0">
               <a:buNone/>
             </a:pPr>
             <a:r>
@@ -2066,9 +1805,6 @@
               </a:rPr>
               <a:t>FAM 7×7  ·  </a:t>
             </a:r>
-            <a:pPr indent="0" marL="0">
-              <a:buNone/>
-            </a:pPr>
             <a:r>
               <a:rPr lang="en-US" sz="1300" dirty="0">
                 <a:solidFill>
@@ -2078,21 +1814,7 @@
                 <a:ea typeface="Calibri" pitchFamily="34" charset="-122"/>
                 <a:cs typeface="Calibri" pitchFamily="34" charset="-120"/>
               </a:rPr>
-              <a:t>Mamdani  ·  </a:t>
-            </a:r>
-            <a:pPr indent="0" marL="0">
-              <a:buNone/>
-            </a:pPr>
-            <a:r>
-              <a:rPr lang="en-US" sz="1300" dirty="0">
-                <a:solidFill>
-                  <a:srgbClr val="8890A8"/>
-                </a:solidFill>
-                <a:latin typeface="Calibri" pitchFamily="34" charset="0"/>
-                <a:ea typeface="Calibri" pitchFamily="34" charset="-122"/>
-                <a:cs typeface="Calibri" pitchFamily="34" charset="-120"/>
-              </a:rPr>
-              <a:t>Defuzzificación COG</a:t>
+              <a:t>Mamdani  ·  Defuzzificación COG</a:t>
             </a:r>
             <a:endParaRPr lang="en-US" sz="1300" dirty="0"/>
           </a:p>
@@ -2119,7 +1841,7 @@
           <a:bodyPr wrap="square" rtlCol="0" anchor="ctr"/>
           <a:lstStyle/>
           <a:p>
-            <a:pPr indent="0" marL="0">
+            <a:pPr marL="0" indent="0">
               <a:buNone/>
             </a:pPr>
             <a:r>
@@ -2139,14 +1861,14 @@
       </p:sp>
       <p:pic>
         <p:nvPicPr>
-          <p:cNvPr id="10" name="Image 0" descr="preencoded.png">    </p:cNvPr>
+          <p:cNvPr id="10" name="Image 0" descr="preencoded.png"/>
           <p:cNvPicPr>
             <a:picLocks noChangeAspect="1"/>
           </p:cNvPicPr>
           <p:nvPr/>
         </p:nvPicPr>
         <p:blipFill>
-          <a:blip r:embed="rId1"/>
+          <a:blip r:embed="rId3"/>
           <a:stretch>
             <a:fillRect/>
           </a:stretch>
@@ -2177,6 +1899,7 @@
         <a:solidFill>
           <a:srgbClr val="0B0F1A"/>
         </a:solidFill>
+        <a:effectLst/>
       </p:bgPr>
     </p:bg>
     <p:spTree>
@@ -2234,7 +1957,7 @@
           <a:bodyPr wrap="square" rtlCol="0" anchor="ctr"/>
           <a:lstStyle/>
           <a:p>
-            <a:pPr indent="0" marL="0">
+            <a:pPr marL="0" indent="0">
               <a:buNone/>
             </a:pPr>
             <a:r>
@@ -2252,30 +1975,6 @@
           </a:p>
         </p:txBody>
       </p:sp>
-      <p:pic>
-        <p:nvPicPr>
-          <p:cNvPr id="4" name="Image 0" descr="preencoded.png">    </p:cNvPr>
-          <p:cNvPicPr>
-            <a:picLocks noChangeAspect="1"/>
-          </p:cNvPicPr>
-          <p:nvPr/>
-        </p:nvPicPr>
-        <p:blipFill>
-          <a:blip r:embed="rId1"/>
-          <a:stretch>
-            <a:fillRect/>
-          </a:stretch>
-        </p:blipFill>
-        <p:spPr>
-          <a:xfrm>
-            <a:off x="1371600" y="777240"/>
-            <a:ext cx="5303520" cy="3383280"/>
-          </a:xfrm>
-          <a:prstGeom prst="rect">
-            <a:avLst/>
-          </a:prstGeom>
-        </p:spPr>
-      </p:pic>
       <p:sp>
         <p:nvSpPr>
           <p:cNvPr id="5" name="Shape 2"/>
@@ -2322,7 +2021,7 @@
           <a:bodyPr wrap="square" rtlCol="0" anchor="ctr"/>
           <a:lstStyle/>
           <a:p>
-            <a:pPr indent="0" marL="0">
+            <a:pPr marL="0" indent="0">
               <a:buNone/>
             </a:pPr>
             <a:r>
@@ -2361,7 +2060,7 @@
           <a:bodyPr wrap="square" rtlCol="0" anchor="t"/>
           <a:lstStyle/>
           <a:p>
-            <a:pPr indent="0" marL="0">
+            <a:pPr marL="0" indent="0">
               <a:buNone/>
             </a:pPr>
             <a:r>
@@ -2376,9 +2075,6 @@
               <a:t>Diagonal → Z
 </a:t>
             </a:r>
-            <a:pPr indent="0" marL="0">
-              <a:buNone/>
-            </a:pPr>
             <a:r>
               <a:rPr lang="en-US" sz="950" dirty="0">
                 <a:solidFill>
@@ -2415,7 +2111,7 @@
           <a:bodyPr wrap="square" rtlCol="0" anchor="t"/>
           <a:lstStyle/>
           <a:p>
-            <a:pPr indent="0" marL="0">
+            <a:pPr marL="0" indent="0">
               <a:buNone/>
             </a:pPr>
             <a:r>
@@ -2430,9 +2126,6 @@
               <a:t>θ&gt;0, θ'&lt;0
 </a:t>
             </a:r>
-            <a:pPr indent="0" marL="0">
-              <a:buNone/>
-            </a:pPr>
             <a:r>
               <a:rPr lang="en-US" sz="950" dirty="0">
                 <a:solidFill>
@@ -2469,7 +2162,7 @@
           <a:bodyPr wrap="square" rtlCol="0" anchor="t"/>
           <a:lstStyle/>
           <a:p>
-            <a:pPr indent="0" marL="0">
+            <a:pPr marL="0" indent="0">
               <a:buNone/>
             </a:pPr>
             <a:r>
@@ -2484,9 +2177,6 @@
               <a:t>θ&lt;0, θ'&gt;0
 </a:t>
             </a:r>
-            <a:pPr indent="0" marL="0">
-              <a:buNone/>
-            </a:pPr>
             <a:r>
               <a:rPr lang="en-US" sz="950" dirty="0">
                 <a:solidFill>
@@ -2523,7 +2213,7 @@
           <a:bodyPr wrap="square" rtlCol="0" anchor="t"/>
           <a:lstStyle/>
           <a:p>
-            <a:pPr indent="0" marL="0">
+            <a:pPr marL="0" indent="0">
               <a:buNone/>
             </a:pPr>
             <a:r>
@@ -2538,9 +2228,6 @@
               <a:t>θ y θ' mismo signo
 </a:t>
             </a:r>
-            <a:pPr indent="0" marL="0">
-              <a:buNone/>
-            </a:pPr>
             <a:r>
               <a:rPr lang="en-US" sz="950" dirty="0">
                 <a:solidFill>
@@ -2556,45 +2243,1293 @@
           </a:p>
         </p:txBody>
       </p:sp>
-      <p:sp>
-        <p:nvSpPr>
-          <p:cNvPr id="11" name="Text 8"/>
-          <p:cNvSpPr/>
-          <p:nvPr/>
-        </p:nvSpPr>
-        <p:spPr>
-          <a:xfrm>
-            <a:off x="274320" y="4754880"/>
-            <a:ext cx="8595360" cy="274320"/>
-          </a:xfrm>
-          <a:prstGeom prst="rect">
-            <a:avLst/>
-          </a:prstGeom>
-          <a:noFill/>
-          <a:ln/>
-        </p:spPr>
-        <p:txBody>
-          <a:bodyPr wrap="square" rtlCol="0" anchor="ctr"/>
-          <a:lstStyle/>
-          <a:p>
-            <a:pPr algn="ctr" indent="0" marL="0">
-              <a:buNone/>
-            </a:pPr>
-            <a:r>
-              <a:rPr lang="en-US" sz="1000" i="1" dirty="0">
-                <a:solidFill>
-                  <a:srgbClr val="8890A8"/>
-                </a:solidFill>
-                <a:latin typeface="Calibri Light" pitchFamily="34" charset="0"/>
-                <a:ea typeface="Calibri Light" pitchFamily="34" charset="-122"/>
-                <a:cs typeface="Calibri Light" pitchFamily="34" charset="-120"/>
-              </a:rPr>
-              <a:t>F &gt; 0 → hacia la izquierda  |  F &lt; 0 → hacia la derecha</a:t>
-            </a:r>
-            <a:endParaRPr lang="en-US" sz="1000" dirty="0"/>
-          </a:p>
-        </p:txBody>
-      </p:sp>
+      <p:graphicFrame>
+        <p:nvGraphicFramePr>
+          <p:cNvPr id="13" name="Tabla 13">
+            <a:extLst>
+              <a:ext uri="{FF2B5EF4-FFF2-40B4-BE49-F238E27FC236}">
+                <a16:creationId xmlns:a16="http://schemas.microsoft.com/office/drawing/2014/main" id="{02C5A225-8B2D-4D8E-9A93-3CC20FD0AC3F}"/>
+              </a:ext>
+            </a:extLst>
+          </p:cNvPr>
+          <p:cNvGraphicFramePr>
+            <a:graphicFrameLocks noGrp="1"/>
+          </p:cNvGraphicFramePr>
+          <p:nvPr>
+            <p:extLst>
+              <p:ext uri="{D42A27DB-BD31-4B8C-83A1-F6EECF244321}">
+                <p14:modId xmlns:p14="http://schemas.microsoft.com/office/powerpoint/2010/main" val="942162974"/>
+              </p:ext>
+            </p:extLst>
+          </p:nvPr>
+        </p:nvGraphicFramePr>
+        <p:xfrm>
+          <a:off x="182880" y="1038860"/>
+          <a:ext cx="6096000" cy="2961640"/>
+        </p:xfrm>
+        <a:graphic>
+          <a:graphicData uri="http://schemas.openxmlformats.org/drawingml/2006/table">
+            <a:tbl>
+              <a:tblPr firstRow="1" bandRow="1">
+                <a:tableStyleId>{5C22544A-7EE6-4342-B048-85BDC9FD1C3A}</a:tableStyleId>
+              </a:tblPr>
+              <a:tblGrid>
+                <a:gridCol w="762000">
+                  <a:extLst>
+                    <a:ext uri="{9D8B030D-6E8A-4147-A177-3AD203B41FA5}">
+                      <a16:colId xmlns:a16="http://schemas.microsoft.com/office/drawing/2014/main" val="1191358002"/>
+                    </a:ext>
+                  </a:extLst>
+                </a:gridCol>
+                <a:gridCol w="762000">
+                  <a:extLst>
+                    <a:ext uri="{9D8B030D-6E8A-4147-A177-3AD203B41FA5}">
+                      <a16:colId xmlns:a16="http://schemas.microsoft.com/office/drawing/2014/main" val="2023272345"/>
+                    </a:ext>
+                  </a:extLst>
+                </a:gridCol>
+                <a:gridCol w="762000">
+                  <a:extLst>
+                    <a:ext uri="{9D8B030D-6E8A-4147-A177-3AD203B41FA5}">
+                      <a16:colId xmlns:a16="http://schemas.microsoft.com/office/drawing/2014/main" val="3905699182"/>
+                    </a:ext>
+                  </a:extLst>
+                </a:gridCol>
+                <a:gridCol w="762000">
+                  <a:extLst>
+                    <a:ext uri="{9D8B030D-6E8A-4147-A177-3AD203B41FA5}">
+                      <a16:colId xmlns:a16="http://schemas.microsoft.com/office/drawing/2014/main" val="1838086576"/>
+                    </a:ext>
+                  </a:extLst>
+                </a:gridCol>
+                <a:gridCol w="762000">
+                  <a:extLst>
+                    <a:ext uri="{9D8B030D-6E8A-4147-A177-3AD203B41FA5}">
+                      <a16:colId xmlns:a16="http://schemas.microsoft.com/office/drawing/2014/main" val="173555987"/>
+                    </a:ext>
+                  </a:extLst>
+                </a:gridCol>
+                <a:gridCol w="762000">
+                  <a:extLst>
+                    <a:ext uri="{9D8B030D-6E8A-4147-A177-3AD203B41FA5}">
+                      <a16:colId xmlns:a16="http://schemas.microsoft.com/office/drawing/2014/main" val="4239224340"/>
+                    </a:ext>
+                  </a:extLst>
+                </a:gridCol>
+                <a:gridCol w="762000">
+                  <a:extLst>
+                    <a:ext uri="{9D8B030D-6E8A-4147-A177-3AD203B41FA5}">
+                      <a16:colId xmlns:a16="http://schemas.microsoft.com/office/drawing/2014/main" val="3593113846"/>
+                    </a:ext>
+                  </a:extLst>
+                </a:gridCol>
+                <a:gridCol w="762000">
+                  <a:extLst>
+                    <a:ext uri="{9D8B030D-6E8A-4147-A177-3AD203B41FA5}">
+                      <a16:colId xmlns:a16="http://schemas.microsoft.com/office/drawing/2014/main" val="1708918034"/>
+                    </a:ext>
+                  </a:extLst>
+                </a:gridCol>
+              </a:tblGrid>
+              <a:tr h="261620">
+                <a:tc>
+                  <a:txBody>
+                    <a:bodyPr/>
+                    <a:lstStyle/>
+                    <a:p>
+                      <a:r>
+                        <a:rPr lang="el-GR" sz="1800" dirty="0">
+                          <a:solidFill>
+                            <a:schemeClr val="bg1"/>
+                          </a:solidFill>
+                        </a:rPr>
+                        <a:t>θ̇</a:t>
+                      </a:r>
+                      <a:r>
+                        <a:rPr lang="es-MX" sz="1800" dirty="0">
+                          <a:solidFill>
+                            <a:schemeClr val="bg1"/>
+                          </a:solidFill>
+                        </a:rPr>
+                        <a:t>´</a:t>
+                      </a:r>
+                      <a:r>
+                        <a:rPr lang="el-GR" sz="1800" dirty="0">
+                          <a:solidFill>
+                            <a:schemeClr val="bg1"/>
+                          </a:solidFill>
+                        </a:rPr>
+                        <a:t> \ θ</a:t>
+                      </a:r>
+                    </a:p>
+                  </a:txBody>
+                  <a:tcPr anchor="ctr"/>
+                </a:tc>
+                <a:tc>
+                  <a:txBody>
+                    <a:bodyPr/>
+                    <a:lstStyle/>
+                    <a:p>
+                      <a:r>
+                        <a:rPr lang="es-AR" sz="1800" dirty="0">
+                          <a:solidFill>
+                            <a:schemeClr val="bg1"/>
+                          </a:solidFill>
+                        </a:rPr>
+                        <a:t>NGG</a:t>
+                      </a:r>
+                    </a:p>
+                  </a:txBody>
+                  <a:tcPr anchor="ctr"/>
+                </a:tc>
+                <a:tc>
+                  <a:txBody>
+                    <a:bodyPr/>
+                    <a:lstStyle/>
+                    <a:p>
+                      <a:r>
+                        <a:rPr lang="es-AR" sz="1800">
+                          <a:solidFill>
+                            <a:schemeClr val="bg1"/>
+                          </a:solidFill>
+                        </a:rPr>
+                        <a:t>NG</a:t>
+                      </a:r>
+                    </a:p>
+                  </a:txBody>
+                  <a:tcPr anchor="ctr"/>
+                </a:tc>
+                <a:tc>
+                  <a:txBody>
+                    <a:bodyPr/>
+                    <a:lstStyle/>
+                    <a:p>
+                      <a:r>
+                        <a:rPr lang="es-AR" sz="1800">
+                          <a:solidFill>
+                            <a:schemeClr val="bg1"/>
+                          </a:solidFill>
+                        </a:rPr>
+                        <a:t>NP</a:t>
+                      </a:r>
+                    </a:p>
+                  </a:txBody>
+                  <a:tcPr anchor="ctr"/>
+                </a:tc>
+                <a:tc>
+                  <a:txBody>
+                    <a:bodyPr/>
+                    <a:lstStyle/>
+                    <a:p>
+                      <a:r>
+                        <a:rPr lang="es-AR" sz="1800">
+                          <a:solidFill>
+                            <a:schemeClr val="bg1"/>
+                          </a:solidFill>
+                        </a:rPr>
+                        <a:t>Z</a:t>
+                      </a:r>
+                    </a:p>
+                  </a:txBody>
+                  <a:tcPr anchor="ctr"/>
+                </a:tc>
+                <a:tc>
+                  <a:txBody>
+                    <a:bodyPr/>
+                    <a:lstStyle/>
+                    <a:p>
+                      <a:r>
+                        <a:rPr lang="es-AR" sz="1800">
+                          <a:solidFill>
+                            <a:schemeClr val="bg1"/>
+                          </a:solidFill>
+                        </a:rPr>
+                        <a:t>PP</a:t>
+                      </a:r>
+                    </a:p>
+                  </a:txBody>
+                  <a:tcPr anchor="ctr"/>
+                </a:tc>
+                <a:tc>
+                  <a:txBody>
+                    <a:bodyPr/>
+                    <a:lstStyle/>
+                    <a:p>
+                      <a:r>
+                        <a:rPr lang="es-AR" sz="1800">
+                          <a:solidFill>
+                            <a:schemeClr val="bg1"/>
+                          </a:solidFill>
+                        </a:rPr>
+                        <a:t>PG</a:t>
+                      </a:r>
+                    </a:p>
+                  </a:txBody>
+                  <a:tcPr anchor="ctr"/>
+                </a:tc>
+                <a:tc>
+                  <a:txBody>
+                    <a:bodyPr/>
+                    <a:lstStyle/>
+                    <a:p>
+                      <a:r>
+                        <a:rPr lang="es-AR" sz="1800">
+                          <a:solidFill>
+                            <a:schemeClr val="bg1"/>
+                          </a:solidFill>
+                        </a:rPr>
+                        <a:t>PGG</a:t>
+                      </a:r>
+                    </a:p>
+                  </a:txBody>
+                  <a:tcPr anchor="ctr"/>
+                </a:tc>
+                <a:extLst>
+                  <a:ext uri="{0D108BD9-81ED-4DB2-BD59-A6C34878D82A}">
+                    <a16:rowId xmlns:a16="http://schemas.microsoft.com/office/drawing/2014/main" val="1700071051"/>
+                  </a:ext>
+                </a:extLst>
+              </a:tr>
+              <a:tr h="370840">
+                <a:tc>
+                  <a:txBody>
+                    <a:bodyPr/>
+                    <a:lstStyle/>
+                    <a:p>
+                      <a:r>
+                        <a:rPr lang="es-AR" sz="1800" b="1">
+                          <a:solidFill>
+                            <a:schemeClr val="tx1"/>
+                          </a:solidFill>
+                        </a:rPr>
+                        <a:t>NGG</a:t>
+                      </a:r>
+                      <a:endParaRPr lang="es-AR" sz="1800">
+                        <a:solidFill>
+                          <a:schemeClr val="tx1"/>
+                        </a:solidFill>
+                      </a:endParaRPr>
+                    </a:p>
+                  </a:txBody>
+                  <a:tcPr anchor="ctr"/>
+                </a:tc>
+                <a:tc>
+                  <a:txBody>
+                    <a:bodyPr/>
+                    <a:lstStyle/>
+                    <a:p>
+                      <a:r>
+                        <a:rPr lang="es-AR" sz="1800" dirty="0">
+                          <a:solidFill>
+                            <a:schemeClr val="tx1"/>
+                          </a:solidFill>
+                        </a:rPr>
+                        <a:t>PGG</a:t>
+                      </a:r>
+                    </a:p>
+                  </a:txBody>
+                  <a:tcPr anchor="ctr"/>
+                </a:tc>
+                <a:tc>
+                  <a:txBody>
+                    <a:bodyPr/>
+                    <a:lstStyle/>
+                    <a:p>
+                      <a:r>
+                        <a:rPr lang="es-AR" sz="1800">
+                          <a:solidFill>
+                            <a:schemeClr val="tx1"/>
+                          </a:solidFill>
+                        </a:rPr>
+                        <a:t>PGG</a:t>
+                      </a:r>
+                    </a:p>
+                  </a:txBody>
+                  <a:tcPr anchor="ctr"/>
+                </a:tc>
+                <a:tc>
+                  <a:txBody>
+                    <a:bodyPr/>
+                    <a:lstStyle/>
+                    <a:p>
+                      <a:r>
+                        <a:rPr lang="es-AR" sz="1800">
+                          <a:solidFill>
+                            <a:schemeClr val="tx1"/>
+                          </a:solidFill>
+                        </a:rPr>
+                        <a:t>PGG</a:t>
+                      </a:r>
+                    </a:p>
+                  </a:txBody>
+                  <a:tcPr anchor="ctr"/>
+                </a:tc>
+                <a:tc>
+                  <a:txBody>
+                    <a:bodyPr/>
+                    <a:lstStyle/>
+                    <a:p>
+                      <a:r>
+                        <a:rPr lang="es-AR" sz="1800">
+                          <a:solidFill>
+                            <a:schemeClr val="tx1"/>
+                          </a:solidFill>
+                        </a:rPr>
+                        <a:t>PP</a:t>
+                      </a:r>
+                    </a:p>
+                  </a:txBody>
+                  <a:tcPr anchor="ctr"/>
+                </a:tc>
+                <a:tc>
+                  <a:txBody>
+                    <a:bodyPr/>
+                    <a:lstStyle/>
+                    <a:p>
+                      <a:r>
+                        <a:rPr lang="es-AR" sz="1800">
+                          <a:solidFill>
+                            <a:schemeClr val="tx1"/>
+                          </a:solidFill>
+                        </a:rPr>
+                        <a:t>PP</a:t>
+                      </a:r>
+                    </a:p>
+                  </a:txBody>
+                  <a:tcPr anchor="ctr"/>
+                </a:tc>
+                <a:tc>
+                  <a:txBody>
+                    <a:bodyPr/>
+                    <a:lstStyle/>
+                    <a:p>
+                      <a:r>
+                        <a:rPr lang="es-AR" sz="1800">
+                          <a:solidFill>
+                            <a:schemeClr val="tx1"/>
+                          </a:solidFill>
+                        </a:rPr>
+                        <a:t>NP</a:t>
+                      </a:r>
+                    </a:p>
+                  </a:txBody>
+                  <a:tcPr anchor="ctr"/>
+                </a:tc>
+                <a:tc>
+                  <a:txBody>
+                    <a:bodyPr/>
+                    <a:lstStyle/>
+                    <a:p>
+                      <a:r>
+                        <a:rPr lang="es-AR" sz="1800">
+                          <a:solidFill>
+                            <a:schemeClr val="tx1"/>
+                          </a:solidFill>
+                        </a:rPr>
+                        <a:t>NP</a:t>
+                      </a:r>
+                    </a:p>
+                  </a:txBody>
+                  <a:tcPr anchor="ctr"/>
+                </a:tc>
+                <a:extLst>
+                  <a:ext uri="{0D108BD9-81ED-4DB2-BD59-A6C34878D82A}">
+                    <a16:rowId xmlns:a16="http://schemas.microsoft.com/office/drawing/2014/main" val="2838757658"/>
+                  </a:ext>
+                </a:extLst>
+              </a:tr>
+              <a:tr h="370840">
+                <a:tc>
+                  <a:txBody>
+                    <a:bodyPr/>
+                    <a:lstStyle/>
+                    <a:p>
+                      <a:r>
+                        <a:rPr lang="es-AR" sz="1800" b="1">
+                          <a:solidFill>
+                            <a:schemeClr val="tx1"/>
+                          </a:solidFill>
+                        </a:rPr>
+                        <a:t>NG</a:t>
+                      </a:r>
+                      <a:endParaRPr lang="es-AR" sz="1800">
+                        <a:solidFill>
+                          <a:schemeClr val="tx1"/>
+                        </a:solidFill>
+                      </a:endParaRPr>
+                    </a:p>
+                  </a:txBody>
+                  <a:tcPr anchor="ctr"/>
+                </a:tc>
+                <a:tc>
+                  <a:txBody>
+                    <a:bodyPr/>
+                    <a:lstStyle/>
+                    <a:p>
+                      <a:r>
+                        <a:rPr lang="es-AR" sz="1800">
+                          <a:solidFill>
+                            <a:schemeClr val="tx1"/>
+                          </a:solidFill>
+                        </a:rPr>
+                        <a:t>PGG</a:t>
+                      </a:r>
+                    </a:p>
+                  </a:txBody>
+                  <a:tcPr anchor="ctr"/>
+                </a:tc>
+                <a:tc>
+                  <a:txBody>
+                    <a:bodyPr/>
+                    <a:lstStyle/>
+                    <a:p>
+                      <a:r>
+                        <a:rPr lang="es-AR" sz="1800">
+                          <a:solidFill>
+                            <a:schemeClr val="tx1"/>
+                          </a:solidFill>
+                        </a:rPr>
+                        <a:t>PGG</a:t>
+                      </a:r>
+                    </a:p>
+                  </a:txBody>
+                  <a:tcPr anchor="ctr"/>
+                </a:tc>
+                <a:tc>
+                  <a:txBody>
+                    <a:bodyPr/>
+                    <a:lstStyle/>
+                    <a:p>
+                      <a:r>
+                        <a:rPr lang="es-AR" sz="1800">
+                          <a:solidFill>
+                            <a:schemeClr val="tx1"/>
+                          </a:solidFill>
+                        </a:rPr>
+                        <a:t>PG</a:t>
+                      </a:r>
+                    </a:p>
+                  </a:txBody>
+                  <a:tcPr anchor="ctr"/>
+                </a:tc>
+                <a:tc>
+                  <a:txBody>
+                    <a:bodyPr/>
+                    <a:lstStyle/>
+                    <a:p>
+                      <a:r>
+                        <a:rPr lang="es-AR" sz="1800">
+                          <a:solidFill>
+                            <a:schemeClr val="tx1"/>
+                          </a:solidFill>
+                        </a:rPr>
+                        <a:t>PP</a:t>
+                      </a:r>
+                    </a:p>
+                  </a:txBody>
+                  <a:tcPr anchor="ctr"/>
+                </a:tc>
+                <a:tc>
+                  <a:txBody>
+                    <a:bodyPr/>
+                    <a:lstStyle/>
+                    <a:p>
+                      <a:r>
+                        <a:rPr lang="es-AR" sz="1800">
+                          <a:solidFill>
+                            <a:schemeClr val="tx1"/>
+                          </a:solidFill>
+                        </a:rPr>
+                        <a:t>Z</a:t>
+                      </a:r>
+                    </a:p>
+                  </a:txBody>
+                  <a:tcPr anchor="ctr"/>
+                </a:tc>
+                <a:tc>
+                  <a:txBody>
+                    <a:bodyPr/>
+                    <a:lstStyle/>
+                    <a:p>
+                      <a:r>
+                        <a:rPr lang="es-AR" sz="1800">
+                          <a:solidFill>
+                            <a:schemeClr val="tx1"/>
+                          </a:solidFill>
+                        </a:rPr>
+                        <a:t>NP</a:t>
+                      </a:r>
+                    </a:p>
+                  </a:txBody>
+                  <a:tcPr anchor="ctr"/>
+                </a:tc>
+                <a:tc>
+                  <a:txBody>
+                    <a:bodyPr/>
+                    <a:lstStyle/>
+                    <a:p>
+                      <a:r>
+                        <a:rPr lang="es-AR" sz="1800">
+                          <a:solidFill>
+                            <a:schemeClr val="tx1"/>
+                          </a:solidFill>
+                        </a:rPr>
+                        <a:t>NG</a:t>
+                      </a:r>
+                    </a:p>
+                  </a:txBody>
+                  <a:tcPr anchor="ctr"/>
+                </a:tc>
+                <a:extLst>
+                  <a:ext uri="{0D108BD9-81ED-4DB2-BD59-A6C34878D82A}">
+                    <a16:rowId xmlns:a16="http://schemas.microsoft.com/office/drawing/2014/main" val="3716669432"/>
+                  </a:ext>
+                </a:extLst>
+              </a:tr>
+              <a:tr h="370840">
+                <a:tc>
+                  <a:txBody>
+                    <a:bodyPr/>
+                    <a:lstStyle/>
+                    <a:p>
+                      <a:r>
+                        <a:rPr lang="es-AR" sz="1800" b="1">
+                          <a:solidFill>
+                            <a:schemeClr val="tx1"/>
+                          </a:solidFill>
+                        </a:rPr>
+                        <a:t>NP</a:t>
+                      </a:r>
+                      <a:endParaRPr lang="es-AR" sz="1800">
+                        <a:solidFill>
+                          <a:schemeClr val="tx1"/>
+                        </a:solidFill>
+                      </a:endParaRPr>
+                    </a:p>
+                  </a:txBody>
+                  <a:tcPr anchor="ctr"/>
+                </a:tc>
+                <a:tc>
+                  <a:txBody>
+                    <a:bodyPr/>
+                    <a:lstStyle/>
+                    <a:p>
+                      <a:r>
+                        <a:rPr lang="es-AR" sz="1800">
+                          <a:solidFill>
+                            <a:schemeClr val="tx1"/>
+                          </a:solidFill>
+                        </a:rPr>
+                        <a:t>PGG</a:t>
+                      </a:r>
+                    </a:p>
+                  </a:txBody>
+                  <a:tcPr anchor="ctr"/>
+                </a:tc>
+                <a:tc>
+                  <a:txBody>
+                    <a:bodyPr/>
+                    <a:lstStyle/>
+                    <a:p>
+                      <a:r>
+                        <a:rPr lang="es-AR" sz="1800">
+                          <a:solidFill>
+                            <a:schemeClr val="tx1"/>
+                          </a:solidFill>
+                        </a:rPr>
+                        <a:t>PGG</a:t>
+                      </a:r>
+                    </a:p>
+                  </a:txBody>
+                  <a:tcPr anchor="ctr"/>
+                </a:tc>
+                <a:tc>
+                  <a:txBody>
+                    <a:bodyPr/>
+                    <a:lstStyle/>
+                    <a:p>
+                      <a:r>
+                        <a:rPr lang="es-AR" sz="1800">
+                          <a:solidFill>
+                            <a:schemeClr val="tx1"/>
+                          </a:solidFill>
+                        </a:rPr>
+                        <a:t>PP</a:t>
+                      </a:r>
+                    </a:p>
+                  </a:txBody>
+                  <a:tcPr anchor="ctr"/>
+                </a:tc>
+                <a:tc>
+                  <a:txBody>
+                    <a:bodyPr/>
+                    <a:lstStyle/>
+                    <a:p>
+                      <a:r>
+                        <a:rPr lang="es-AR" sz="1800">
+                          <a:solidFill>
+                            <a:schemeClr val="tx1"/>
+                          </a:solidFill>
+                        </a:rPr>
+                        <a:t>PP</a:t>
+                      </a:r>
+                    </a:p>
+                  </a:txBody>
+                  <a:tcPr anchor="ctr"/>
+                </a:tc>
+                <a:tc>
+                  <a:txBody>
+                    <a:bodyPr/>
+                    <a:lstStyle/>
+                    <a:p>
+                      <a:r>
+                        <a:rPr lang="es-AR" sz="1800">
+                          <a:solidFill>
+                            <a:schemeClr val="tx1"/>
+                          </a:solidFill>
+                        </a:rPr>
+                        <a:t>NP</a:t>
+                      </a:r>
+                    </a:p>
+                  </a:txBody>
+                  <a:tcPr anchor="ctr"/>
+                </a:tc>
+                <a:tc>
+                  <a:txBody>
+                    <a:bodyPr/>
+                    <a:lstStyle/>
+                    <a:p>
+                      <a:r>
+                        <a:rPr lang="es-AR" sz="1800">
+                          <a:solidFill>
+                            <a:schemeClr val="tx1"/>
+                          </a:solidFill>
+                        </a:rPr>
+                        <a:t>NP</a:t>
+                      </a:r>
+                    </a:p>
+                  </a:txBody>
+                  <a:tcPr anchor="ctr"/>
+                </a:tc>
+                <a:tc>
+                  <a:txBody>
+                    <a:bodyPr/>
+                    <a:lstStyle/>
+                    <a:p>
+                      <a:r>
+                        <a:rPr lang="es-AR" sz="1800">
+                          <a:solidFill>
+                            <a:schemeClr val="tx1"/>
+                          </a:solidFill>
+                        </a:rPr>
+                        <a:t>NGG</a:t>
+                      </a:r>
+                    </a:p>
+                  </a:txBody>
+                  <a:tcPr anchor="ctr"/>
+                </a:tc>
+                <a:extLst>
+                  <a:ext uri="{0D108BD9-81ED-4DB2-BD59-A6C34878D82A}">
+                    <a16:rowId xmlns:a16="http://schemas.microsoft.com/office/drawing/2014/main" val="712868018"/>
+                  </a:ext>
+                </a:extLst>
+              </a:tr>
+              <a:tr h="370840">
+                <a:tc>
+                  <a:txBody>
+                    <a:bodyPr/>
+                    <a:lstStyle/>
+                    <a:p>
+                      <a:r>
+                        <a:rPr lang="es-AR" sz="1800" b="1">
+                          <a:solidFill>
+                            <a:schemeClr val="tx1"/>
+                          </a:solidFill>
+                        </a:rPr>
+                        <a:t>Z</a:t>
+                      </a:r>
+                      <a:endParaRPr lang="es-AR" sz="1800">
+                        <a:solidFill>
+                          <a:schemeClr val="tx1"/>
+                        </a:solidFill>
+                      </a:endParaRPr>
+                    </a:p>
+                  </a:txBody>
+                  <a:tcPr anchor="ctr"/>
+                </a:tc>
+                <a:tc>
+                  <a:txBody>
+                    <a:bodyPr/>
+                    <a:lstStyle/>
+                    <a:p>
+                      <a:r>
+                        <a:rPr lang="es-AR" sz="1800" dirty="0">
+                          <a:solidFill>
+                            <a:schemeClr val="tx1"/>
+                          </a:solidFill>
+                        </a:rPr>
+                        <a:t>PGG</a:t>
+                      </a:r>
+                    </a:p>
+                  </a:txBody>
+                  <a:tcPr anchor="ctr"/>
+                </a:tc>
+                <a:tc>
+                  <a:txBody>
+                    <a:bodyPr/>
+                    <a:lstStyle/>
+                    <a:p>
+                      <a:r>
+                        <a:rPr lang="es-AR" sz="1800">
+                          <a:solidFill>
+                            <a:schemeClr val="tx1"/>
+                          </a:solidFill>
+                        </a:rPr>
+                        <a:t>PG</a:t>
+                      </a:r>
+                    </a:p>
+                  </a:txBody>
+                  <a:tcPr anchor="ctr"/>
+                </a:tc>
+                <a:tc>
+                  <a:txBody>
+                    <a:bodyPr/>
+                    <a:lstStyle/>
+                    <a:p>
+                      <a:r>
+                        <a:rPr lang="es-AR" sz="1800">
+                          <a:solidFill>
+                            <a:schemeClr val="tx1"/>
+                          </a:solidFill>
+                        </a:rPr>
+                        <a:t>PP</a:t>
+                      </a:r>
+                    </a:p>
+                  </a:txBody>
+                  <a:tcPr anchor="ctr"/>
+                </a:tc>
+                <a:tc>
+                  <a:txBody>
+                    <a:bodyPr/>
+                    <a:lstStyle/>
+                    <a:p>
+                      <a:r>
+                        <a:rPr lang="es-AR" sz="1800">
+                          <a:solidFill>
+                            <a:schemeClr val="tx1"/>
+                          </a:solidFill>
+                        </a:rPr>
+                        <a:t>Z</a:t>
+                      </a:r>
+                    </a:p>
+                  </a:txBody>
+                  <a:tcPr anchor="ctr"/>
+                </a:tc>
+                <a:tc>
+                  <a:txBody>
+                    <a:bodyPr/>
+                    <a:lstStyle/>
+                    <a:p>
+                      <a:r>
+                        <a:rPr lang="es-AR" sz="1800">
+                          <a:solidFill>
+                            <a:schemeClr val="tx1"/>
+                          </a:solidFill>
+                        </a:rPr>
+                        <a:t>NP</a:t>
+                      </a:r>
+                    </a:p>
+                  </a:txBody>
+                  <a:tcPr anchor="ctr"/>
+                </a:tc>
+                <a:tc>
+                  <a:txBody>
+                    <a:bodyPr/>
+                    <a:lstStyle/>
+                    <a:p>
+                      <a:r>
+                        <a:rPr lang="es-AR" sz="1800">
+                          <a:solidFill>
+                            <a:schemeClr val="tx1"/>
+                          </a:solidFill>
+                        </a:rPr>
+                        <a:t>NG</a:t>
+                      </a:r>
+                    </a:p>
+                  </a:txBody>
+                  <a:tcPr anchor="ctr"/>
+                </a:tc>
+                <a:tc>
+                  <a:txBody>
+                    <a:bodyPr/>
+                    <a:lstStyle/>
+                    <a:p>
+                      <a:r>
+                        <a:rPr lang="es-AR" sz="1800">
+                          <a:solidFill>
+                            <a:schemeClr val="tx1"/>
+                          </a:solidFill>
+                        </a:rPr>
+                        <a:t>NGG</a:t>
+                      </a:r>
+                    </a:p>
+                  </a:txBody>
+                  <a:tcPr anchor="ctr"/>
+                </a:tc>
+                <a:extLst>
+                  <a:ext uri="{0D108BD9-81ED-4DB2-BD59-A6C34878D82A}">
+                    <a16:rowId xmlns:a16="http://schemas.microsoft.com/office/drawing/2014/main" val="4065027840"/>
+                  </a:ext>
+                </a:extLst>
+              </a:tr>
+              <a:tr h="370840">
+                <a:tc>
+                  <a:txBody>
+                    <a:bodyPr/>
+                    <a:lstStyle/>
+                    <a:p>
+                      <a:r>
+                        <a:rPr lang="es-AR" sz="1800" b="1">
+                          <a:solidFill>
+                            <a:schemeClr val="tx1"/>
+                          </a:solidFill>
+                        </a:rPr>
+                        <a:t>PP</a:t>
+                      </a:r>
+                      <a:endParaRPr lang="es-AR" sz="1800">
+                        <a:solidFill>
+                          <a:schemeClr val="tx1"/>
+                        </a:solidFill>
+                      </a:endParaRPr>
+                    </a:p>
+                  </a:txBody>
+                  <a:tcPr anchor="ctr"/>
+                </a:tc>
+                <a:tc>
+                  <a:txBody>
+                    <a:bodyPr/>
+                    <a:lstStyle/>
+                    <a:p>
+                      <a:r>
+                        <a:rPr lang="es-AR" sz="1800" dirty="0">
+                          <a:solidFill>
+                            <a:schemeClr val="tx1"/>
+                          </a:solidFill>
+                        </a:rPr>
+                        <a:t>PGG</a:t>
+                      </a:r>
+                    </a:p>
+                  </a:txBody>
+                  <a:tcPr anchor="ctr"/>
+                </a:tc>
+                <a:tc>
+                  <a:txBody>
+                    <a:bodyPr/>
+                    <a:lstStyle/>
+                    <a:p>
+                      <a:r>
+                        <a:rPr lang="es-AR" sz="1800">
+                          <a:solidFill>
+                            <a:schemeClr val="tx1"/>
+                          </a:solidFill>
+                        </a:rPr>
+                        <a:t>PP</a:t>
+                      </a:r>
+                    </a:p>
+                  </a:txBody>
+                  <a:tcPr anchor="ctr"/>
+                </a:tc>
+                <a:tc>
+                  <a:txBody>
+                    <a:bodyPr/>
+                    <a:lstStyle/>
+                    <a:p>
+                      <a:r>
+                        <a:rPr lang="es-AR" sz="1800">
+                          <a:solidFill>
+                            <a:schemeClr val="tx1"/>
+                          </a:solidFill>
+                        </a:rPr>
+                        <a:t>PP</a:t>
+                      </a:r>
+                    </a:p>
+                  </a:txBody>
+                  <a:tcPr anchor="ctr"/>
+                </a:tc>
+                <a:tc>
+                  <a:txBody>
+                    <a:bodyPr/>
+                    <a:lstStyle/>
+                    <a:p>
+                      <a:r>
+                        <a:rPr lang="es-AR" sz="1800">
+                          <a:solidFill>
+                            <a:schemeClr val="tx1"/>
+                          </a:solidFill>
+                        </a:rPr>
+                        <a:t>NP</a:t>
+                      </a:r>
+                    </a:p>
+                  </a:txBody>
+                  <a:tcPr anchor="ctr"/>
+                </a:tc>
+                <a:tc>
+                  <a:txBody>
+                    <a:bodyPr/>
+                    <a:lstStyle/>
+                    <a:p>
+                      <a:r>
+                        <a:rPr lang="es-AR" sz="1800">
+                          <a:solidFill>
+                            <a:schemeClr val="tx1"/>
+                          </a:solidFill>
+                        </a:rPr>
+                        <a:t>NP</a:t>
+                      </a:r>
+                    </a:p>
+                  </a:txBody>
+                  <a:tcPr anchor="ctr"/>
+                </a:tc>
+                <a:tc>
+                  <a:txBody>
+                    <a:bodyPr/>
+                    <a:lstStyle/>
+                    <a:p>
+                      <a:r>
+                        <a:rPr lang="es-AR" sz="1800">
+                          <a:solidFill>
+                            <a:schemeClr val="tx1"/>
+                          </a:solidFill>
+                        </a:rPr>
+                        <a:t>NGG</a:t>
+                      </a:r>
+                    </a:p>
+                  </a:txBody>
+                  <a:tcPr anchor="ctr"/>
+                </a:tc>
+                <a:tc>
+                  <a:txBody>
+                    <a:bodyPr/>
+                    <a:lstStyle/>
+                    <a:p>
+                      <a:r>
+                        <a:rPr lang="es-AR" sz="1800">
+                          <a:solidFill>
+                            <a:schemeClr val="tx1"/>
+                          </a:solidFill>
+                        </a:rPr>
+                        <a:t>NGG</a:t>
+                      </a:r>
+                    </a:p>
+                  </a:txBody>
+                  <a:tcPr anchor="ctr"/>
+                </a:tc>
+                <a:extLst>
+                  <a:ext uri="{0D108BD9-81ED-4DB2-BD59-A6C34878D82A}">
+                    <a16:rowId xmlns:a16="http://schemas.microsoft.com/office/drawing/2014/main" val="1969270183"/>
+                  </a:ext>
+                </a:extLst>
+              </a:tr>
+              <a:tr h="370840">
+                <a:tc>
+                  <a:txBody>
+                    <a:bodyPr/>
+                    <a:lstStyle/>
+                    <a:p>
+                      <a:r>
+                        <a:rPr lang="es-AR" sz="1800" b="1">
+                          <a:solidFill>
+                            <a:schemeClr val="tx1"/>
+                          </a:solidFill>
+                        </a:rPr>
+                        <a:t>PG</a:t>
+                      </a:r>
+                      <a:endParaRPr lang="es-AR" sz="1800">
+                        <a:solidFill>
+                          <a:schemeClr val="tx1"/>
+                        </a:solidFill>
+                      </a:endParaRPr>
+                    </a:p>
+                  </a:txBody>
+                  <a:tcPr anchor="ctr"/>
+                </a:tc>
+                <a:tc>
+                  <a:txBody>
+                    <a:bodyPr/>
+                    <a:lstStyle/>
+                    <a:p>
+                      <a:r>
+                        <a:rPr lang="es-AR" sz="1800">
+                          <a:solidFill>
+                            <a:schemeClr val="tx1"/>
+                          </a:solidFill>
+                        </a:rPr>
+                        <a:t>PG</a:t>
+                      </a:r>
+                    </a:p>
+                  </a:txBody>
+                  <a:tcPr anchor="ctr"/>
+                </a:tc>
+                <a:tc>
+                  <a:txBody>
+                    <a:bodyPr/>
+                    <a:lstStyle/>
+                    <a:p>
+                      <a:r>
+                        <a:rPr lang="es-AR" sz="1800">
+                          <a:solidFill>
+                            <a:schemeClr val="tx1"/>
+                          </a:solidFill>
+                        </a:rPr>
+                        <a:t>PP</a:t>
+                      </a:r>
+                    </a:p>
+                  </a:txBody>
+                  <a:tcPr anchor="ctr"/>
+                </a:tc>
+                <a:tc>
+                  <a:txBody>
+                    <a:bodyPr/>
+                    <a:lstStyle/>
+                    <a:p>
+                      <a:r>
+                        <a:rPr lang="es-AR" sz="1800">
+                          <a:solidFill>
+                            <a:schemeClr val="tx1"/>
+                          </a:solidFill>
+                        </a:rPr>
+                        <a:t>Z</a:t>
+                      </a:r>
+                    </a:p>
+                  </a:txBody>
+                  <a:tcPr anchor="ctr"/>
+                </a:tc>
+                <a:tc>
+                  <a:txBody>
+                    <a:bodyPr/>
+                    <a:lstStyle/>
+                    <a:p>
+                      <a:r>
+                        <a:rPr lang="es-AR" sz="1800">
+                          <a:solidFill>
+                            <a:schemeClr val="tx1"/>
+                          </a:solidFill>
+                        </a:rPr>
+                        <a:t>NP</a:t>
+                      </a:r>
+                    </a:p>
+                  </a:txBody>
+                  <a:tcPr anchor="ctr"/>
+                </a:tc>
+                <a:tc>
+                  <a:txBody>
+                    <a:bodyPr/>
+                    <a:lstStyle/>
+                    <a:p>
+                      <a:r>
+                        <a:rPr lang="es-AR" sz="1800">
+                          <a:solidFill>
+                            <a:schemeClr val="tx1"/>
+                          </a:solidFill>
+                        </a:rPr>
+                        <a:t>NG</a:t>
+                      </a:r>
+                    </a:p>
+                  </a:txBody>
+                  <a:tcPr anchor="ctr"/>
+                </a:tc>
+                <a:tc>
+                  <a:txBody>
+                    <a:bodyPr/>
+                    <a:lstStyle/>
+                    <a:p>
+                      <a:r>
+                        <a:rPr lang="es-AR" sz="1800">
+                          <a:solidFill>
+                            <a:schemeClr val="tx1"/>
+                          </a:solidFill>
+                        </a:rPr>
+                        <a:t>NGG</a:t>
+                      </a:r>
+                    </a:p>
+                  </a:txBody>
+                  <a:tcPr anchor="ctr"/>
+                </a:tc>
+                <a:tc>
+                  <a:txBody>
+                    <a:bodyPr/>
+                    <a:lstStyle/>
+                    <a:p>
+                      <a:r>
+                        <a:rPr lang="es-AR" sz="1800">
+                          <a:solidFill>
+                            <a:schemeClr val="tx1"/>
+                          </a:solidFill>
+                        </a:rPr>
+                        <a:t>NGG</a:t>
+                      </a:r>
+                    </a:p>
+                  </a:txBody>
+                  <a:tcPr anchor="ctr"/>
+                </a:tc>
+                <a:extLst>
+                  <a:ext uri="{0D108BD9-81ED-4DB2-BD59-A6C34878D82A}">
+                    <a16:rowId xmlns:a16="http://schemas.microsoft.com/office/drawing/2014/main" val="1794862407"/>
+                  </a:ext>
+                </a:extLst>
+              </a:tr>
+              <a:tr h="370840">
+                <a:tc>
+                  <a:txBody>
+                    <a:bodyPr/>
+                    <a:lstStyle/>
+                    <a:p>
+                      <a:r>
+                        <a:rPr lang="es-AR" sz="1800" b="1">
+                          <a:solidFill>
+                            <a:schemeClr val="tx1"/>
+                          </a:solidFill>
+                        </a:rPr>
+                        <a:t>PGG</a:t>
+                      </a:r>
+                      <a:endParaRPr lang="es-AR" sz="1800">
+                        <a:solidFill>
+                          <a:schemeClr val="tx1"/>
+                        </a:solidFill>
+                      </a:endParaRPr>
+                    </a:p>
+                  </a:txBody>
+                  <a:tcPr anchor="ctr"/>
+                </a:tc>
+                <a:tc>
+                  <a:txBody>
+                    <a:bodyPr/>
+                    <a:lstStyle/>
+                    <a:p>
+                      <a:r>
+                        <a:rPr lang="es-AR" sz="1800">
+                          <a:solidFill>
+                            <a:schemeClr val="tx1"/>
+                          </a:solidFill>
+                        </a:rPr>
+                        <a:t>PP</a:t>
+                      </a:r>
+                    </a:p>
+                  </a:txBody>
+                  <a:tcPr anchor="ctr"/>
+                </a:tc>
+                <a:tc>
+                  <a:txBody>
+                    <a:bodyPr/>
+                    <a:lstStyle/>
+                    <a:p>
+                      <a:r>
+                        <a:rPr lang="es-AR" sz="1800">
+                          <a:solidFill>
+                            <a:schemeClr val="tx1"/>
+                          </a:solidFill>
+                        </a:rPr>
+                        <a:t>PP</a:t>
+                      </a:r>
+                    </a:p>
+                  </a:txBody>
+                  <a:tcPr anchor="ctr"/>
+                </a:tc>
+                <a:tc>
+                  <a:txBody>
+                    <a:bodyPr/>
+                    <a:lstStyle/>
+                    <a:p>
+                      <a:r>
+                        <a:rPr lang="es-AR" sz="1800" dirty="0">
+                          <a:solidFill>
+                            <a:schemeClr val="tx1"/>
+                          </a:solidFill>
+                        </a:rPr>
+                        <a:t>NP</a:t>
+                      </a:r>
+                    </a:p>
+                  </a:txBody>
+                  <a:tcPr anchor="ctr"/>
+                </a:tc>
+                <a:tc>
+                  <a:txBody>
+                    <a:bodyPr/>
+                    <a:lstStyle/>
+                    <a:p>
+                      <a:r>
+                        <a:rPr lang="es-AR" sz="1800" dirty="0">
+                          <a:solidFill>
+                            <a:schemeClr val="tx1"/>
+                          </a:solidFill>
+                        </a:rPr>
+                        <a:t>NP</a:t>
+                      </a:r>
+                    </a:p>
+                  </a:txBody>
+                  <a:tcPr anchor="ctr"/>
+                </a:tc>
+                <a:tc>
+                  <a:txBody>
+                    <a:bodyPr/>
+                    <a:lstStyle/>
+                    <a:p>
+                      <a:r>
+                        <a:rPr lang="es-AR" sz="1800" dirty="0">
+                          <a:solidFill>
+                            <a:schemeClr val="tx1"/>
+                          </a:solidFill>
+                        </a:rPr>
+                        <a:t>NGG</a:t>
+                      </a:r>
+                    </a:p>
+                  </a:txBody>
+                  <a:tcPr anchor="ctr"/>
+                </a:tc>
+                <a:tc>
+                  <a:txBody>
+                    <a:bodyPr/>
+                    <a:lstStyle/>
+                    <a:p>
+                      <a:r>
+                        <a:rPr lang="es-AR" sz="1800" dirty="0">
+                          <a:solidFill>
+                            <a:schemeClr val="tx1"/>
+                          </a:solidFill>
+                        </a:rPr>
+                        <a:t>NGG</a:t>
+                      </a:r>
+                    </a:p>
+                  </a:txBody>
+                  <a:tcPr anchor="ctr"/>
+                </a:tc>
+                <a:tc>
+                  <a:txBody>
+                    <a:bodyPr/>
+                    <a:lstStyle/>
+                    <a:p>
+                      <a:r>
+                        <a:rPr lang="es-AR" sz="1800" dirty="0">
+                          <a:solidFill>
+                            <a:schemeClr val="tx1"/>
+                          </a:solidFill>
+                        </a:rPr>
+                        <a:t>NGG</a:t>
+                      </a:r>
+                    </a:p>
+                  </a:txBody>
+                  <a:tcPr anchor="ctr"/>
+                </a:tc>
+                <a:extLst>
+                  <a:ext uri="{0D108BD9-81ED-4DB2-BD59-A6C34878D82A}">
+                    <a16:rowId xmlns:a16="http://schemas.microsoft.com/office/drawing/2014/main" val="1360193388"/>
+                  </a:ext>
+                </a:extLst>
+              </a:tr>
+            </a:tbl>
+          </a:graphicData>
+        </a:graphic>
+      </p:graphicFrame>
     </p:spTree>
   </p:cSld>
   <p:clrMapOvr>
@@ -2611,6 +3546,7 @@
         <a:solidFill>
           <a:srgbClr val="0B0F1A"/>
         </a:solidFill>
+        <a:effectLst/>
       </p:bgPr>
     </p:bg>
     <p:spTree>
@@ -2668,7 +3604,7 @@
           <a:bodyPr wrap="square" rtlCol="0" anchor="ctr"/>
           <a:lstStyle/>
           <a:p>
-            <a:pPr indent="0" marL="0">
+            <a:pPr marL="0" indent="0">
               <a:buNone/>
             </a:pPr>
             <a:r>
@@ -2752,7 +3688,7 @@
           <a:bodyPr wrap="square" rtlCol="0" anchor="ctr"/>
           <a:lstStyle/>
           <a:p>
-            <a:pPr indent="0" marL="0">
+            <a:pPr marL="0" indent="0">
               <a:buNone/>
             </a:pPr>
             <a:r>
@@ -2791,7 +3727,7 @@
           <a:bodyPr wrap="square" rtlCol="0" anchor="t"/>
           <a:lstStyle/>
           <a:p>
-            <a:pPr indent="0" marL="0">
+            <a:pPr marL="0" indent="0">
               <a:buNone/>
             </a:pPr>
             <a:r>
@@ -2875,7 +3811,7 @@
           <a:bodyPr wrap="square" rtlCol="0" anchor="ctr"/>
           <a:lstStyle/>
           <a:p>
-            <a:pPr indent="0" marL="0">
+            <a:pPr marL="0" indent="0">
               <a:buNone/>
             </a:pPr>
             <a:r>
@@ -2914,7 +3850,7 @@
           <a:bodyPr wrap="square" rtlCol="0" anchor="t"/>
           <a:lstStyle/>
           <a:p>
-            <a:pPr indent="0" marL="0">
+            <a:pPr marL="0" indent="0">
               <a:buNone/>
             </a:pPr>
             <a:r>
@@ -2998,7 +3934,7 @@
           <a:bodyPr wrap="square" rtlCol="0" anchor="ctr"/>
           <a:lstStyle/>
           <a:p>
-            <a:pPr indent="0" marL="0">
+            <a:pPr marL="0" indent="0">
               <a:buNone/>
             </a:pPr>
             <a:r>
@@ -3037,7 +3973,7 @@
           <a:bodyPr wrap="square" rtlCol="0" anchor="t"/>
           <a:lstStyle/>
           <a:p>
-            <a:pPr indent="0" marL="0">
+            <a:pPr marL="0" indent="0">
               <a:buNone/>
             </a:pPr>
             <a:r>
@@ -3121,7 +4057,7 @@
           <a:bodyPr wrap="square" rtlCol="0" anchor="ctr"/>
           <a:lstStyle/>
           <a:p>
-            <a:pPr indent="0" marL="0">
+            <a:pPr marL="0" indent="0">
               <a:buNone/>
             </a:pPr>
             <a:r>
@@ -3160,7 +4096,7 @@
           <a:bodyPr wrap="square" rtlCol="0" anchor="t"/>
           <a:lstStyle/>
           <a:p>
-            <a:pPr indent="0" marL="0">
+            <a:pPr marL="0" indent="0">
               <a:buNone/>
             </a:pPr>
             <a:r>
@@ -3199,7 +4135,7 @@
           <a:bodyPr wrap="square" rtlCol="0" anchor="ctr"/>
           <a:lstStyle/>
           <a:p>
-            <a:pPr algn="ctr" indent="0" marL="0">
+            <a:pPr marL="0" indent="0" algn="ctr">
               <a:buNone/>
             </a:pPr>
             <a:r>
@@ -3233,6 +4169,7 @@
         <a:solidFill>
           <a:srgbClr val="0B0F1A"/>
         </a:solidFill>
+        <a:effectLst/>
       </p:bgPr>
     </p:bg>
     <p:spTree>
@@ -3290,7 +4227,7 @@
           <a:bodyPr wrap="square" rtlCol="0" anchor="ctr"/>
           <a:lstStyle/>
           <a:p>
-            <a:pPr indent="0" marL="0">
+            <a:pPr marL="0" indent="0">
               <a:buNone/>
             </a:pPr>
             <a:r>
@@ -3349,7 +4286,7 @@
           <a:bodyPr wrap="square" rtlCol="0" anchor="ctr"/>
           <a:lstStyle/>
           <a:p>
-            <a:pPr algn="ctr" indent="0" marL="0">
+            <a:pPr marL="0" indent="0" algn="ctr">
               <a:buNone/>
             </a:pPr>
             <a:r>
@@ -3388,7 +4325,7 @@
           <a:bodyPr wrap="square" rtlCol="0" anchor="ctr"/>
           <a:lstStyle/>
           <a:p>
-            <a:pPr indent="0" marL="0">
+            <a:pPr marL="0" indent="0">
               <a:buNone/>
             </a:pPr>
             <a:r>
@@ -3467,7 +4404,7 @@
           <a:bodyPr wrap="square" rtlCol="0" anchor="ctr"/>
           <a:lstStyle/>
           <a:p>
-            <a:pPr algn="ctr" indent="0" marL="0">
+            <a:pPr marL="0" indent="0" algn="ctr">
               <a:buNone/>
             </a:pPr>
             <a:r>
@@ -3506,7 +4443,7 @@
           <a:bodyPr wrap="square" rtlCol="0" anchor="ctr"/>
           <a:lstStyle/>
           <a:p>
-            <a:pPr indent="0" marL="0">
+            <a:pPr marL="0" indent="0">
               <a:buNone/>
             </a:pPr>
             <a:r>
@@ -3585,7 +4522,7 @@
           <a:bodyPr wrap="square" rtlCol="0" anchor="ctr"/>
           <a:lstStyle/>
           <a:p>
-            <a:pPr algn="ctr" indent="0" marL="0">
+            <a:pPr marL="0" indent="0" algn="ctr">
               <a:buNone/>
             </a:pPr>
             <a:r>
@@ -3624,7 +4561,7 @@
           <a:bodyPr wrap="square" rtlCol="0" anchor="ctr"/>
           <a:lstStyle/>
           <a:p>
-            <a:pPr indent="0" marL="0">
+            <a:pPr marL="0" indent="0">
               <a:buNone/>
             </a:pPr>
             <a:r>
@@ -3703,7 +4640,7 @@
           <a:bodyPr wrap="square" rtlCol="0" anchor="ctr"/>
           <a:lstStyle/>
           <a:p>
-            <a:pPr algn="ctr" indent="0" marL="0">
+            <a:pPr marL="0" indent="0" algn="ctr">
               <a:buNone/>
             </a:pPr>
             <a:r>
@@ -3742,7 +4679,7 @@
           <a:bodyPr wrap="square" rtlCol="0" anchor="ctr"/>
           <a:lstStyle/>
           <a:p>
-            <a:pPr indent="0" marL="0">
+            <a:pPr marL="0" indent="0">
               <a:buNone/>
             </a:pPr>
             <a:r>
@@ -3821,7 +4758,7 @@
           <a:bodyPr wrap="square" rtlCol="0" anchor="ctr"/>
           <a:lstStyle/>
           <a:p>
-            <a:pPr algn="ctr" indent="0" marL="0">
+            <a:pPr marL="0" indent="0" algn="ctr">
               <a:buNone/>
             </a:pPr>
             <a:r>
@@ -3860,7 +4797,7 @@
           <a:bodyPr wrap="square" rtlCol="0" anchor="ctr"/>
           <a:lstStyle/>
           <a:p>
-            <a:pPr indent="0" marL="0">
+            <a:pPr marL="0" indent="0">
               <a:buNone/>
             </a:pPr>
             <a:r>
@@ -3914,6 +4851,7 @@
         <a:solidFill>
           <a:srgbClr val="0B0F1A"/>
         </a:solidFill>
+        <a:effectLst/>
       </p:bgPr>
     </p:bg>
     <p:spTree>
@@ -3971,7 +4909,7 @@
           <a:bodyPr wrap="square" rtlCol="0" anchor="ctr"/>
           <a:lstStyle/>
           <a:p>
-            <a:pPr indent="0" marL="0">
+            <a:pPr marL="0" indent="0">
               <a:buNone/>
             </a:pPr>
             <a:r>
@@ -4055,7 +4993,7 @@
           <a:bodyPr wrap="square" rtlCol="0" anchor="ctr"/>
           <a:lstStyle/>
           <a:p>
-            <a:pPr indent="0" marL="0">
+            <a:pPr marL="0" indent="0">
               <a:buNone/>
             </a:pPr>
             <a:r>
@@ -4094,7 +5032,7 @@
           <a:bodyPr wrap="square" rtlCol="0" anchor="t"/>
           <a:lstStyle/>
           <a:p>
-            <a:pPr indent="0" marL="0">
+            <a:pPr marL="0" indent="0">
               <a:buNone/>
             </a:pPr>
             <a:r>
@@ -4178,7 +5116,7 @@
           <a:bodyPr wrap="square" rtlCol="0" anchor="ctr"/>
           <a:lstStyle/>
           <a:p>
-            <a:pPr indent="0" marL="0">
+            <a:pPr marL="0" indent="0">
               <a:buNone/>
             </a:pPr>
             <a:r>
@@ -4217,7 +5155,7 @@
           <a:bodyPr wrap="square" rtlCol="0" anchor="t"/>
           <a:lstStyle/>
           <a:p>
-            <a:pPr indent="0" marL="0">
+            <a:pPr marL="0" indent="0">
               <a:buNone/>
             </a:pPr>
             <a:r>
@@ -4301,7 +5239,7 @@
           <a:bodyPr wrap="square" rtlCol="0" anchor="ctr"/>
           <a:lstStyle/>
           <a:p>
-            <a:pPr indent="0" marL="0">
+            <a:pPr marL="0" indent="0">
               <a:buNone/>
             </a:pPr>
             <a:r>
@@ -4340,7 +5278,7 @@
           <a:bodyPr wrap="square" rtlCol="0" anchor="t"/>
           <a:lstStyle/>
           <a:p>
-            <a:pPr indent="0" marL="0">
+            <a:pPr marL="0" indent="0">
               <a:buNone/>
             </a:pPr>
             <a:r>
@@ -4379,7 +5317,7 @@
           <a:bodyPr wrap="square" rtlCol="0" anchor="ctr"/>
           <a:lstStyle/>
           <a:p>
-            <a:pPr indent="0" marL="0">
+            <a:pPr marL="0" indent="0">
               <a:buNone/>
             </a:pPr>
             <a:r>
@@ -4413,6 +5351,7 @@
         <a:solidFill>
           <a:srgbClr val="0B0F1A"/>
         </a:solidFill>
+        <a:effectLst/>
       </p:bgPr>
     </p:bg>
     <p:spTree>
@@ -4470,7 +5409,7 @@
           <a:bodyPr wrap="square" rtlCol="0" anchor="ctr"/>
           <a:lstStyle/>
           <a:p>
-            <a:pPr indent="0" marL="0">
+            <a:pPr marL="0" indent="0">
               <a:buNone/>
             </a:pPr>
             <a:r>
@@ -4554,7 +5493,7 @@
           <a:bodyPr wrap="square" rtlCol="0" anchor="ctr"/>
           <a:lstStyle/>
           <a:p>
-            <a:pPr indent="0" marL="0">
+            <a:pPr marL="0" indent="0">
               <a:buNone/>
             </a:pPr>
             <a:r>
@@ -4593,7 +5532,7 @@
           <a:bodyPr wrap="square" rtlCol="0" anchor="t"/>
           <a:lstStyle/>
           <a:p>
-            <a:pPr indent="0" marL="0">
+            <a:pPr marL="0" indent="0">
               <a:buNone/>
             </a:pPr>
             <a:r>
@@ -4607,9 +5546,6 @@
               </a:rPr>
               <a:t>Valores iniciales </a:t>
             </a:r>
-            <a:pPr indent="0" marL="0">
-              <a:buNone/>
-            </a:pPr>
             <a:r>
               <a:rPr lang="en-US" sz="1200" b="1" dirty="0">
                 <a:solidFill>
@@ -4621,9 +5557,6 @@
               </a:rPr>
               <a:t>sensados o conocidos</a:t>
             </a:r>
-            <a:pPr indent="0" marL="0">
-              <a:buNone/>
-            </a:pPr>
             <a:r>
               <a:rPr lang="en-US" sz="1200" dirty="0">
                 <a:solidFill>
@@ -4638,13 +5571,13 @@
             <a:endParaRPr lang="en-US" sz="1200" dirty="0"/>
           </a:p>
           <a:p>
-            <a:pPr indent="0" marL="0">
+            <a:pPr marL="0" indent="0">
               <a:buNone/>
             </a:pPr>
             <a:endParaRPr lang="en-US" sz="1200" dirty="0"/>
           </a:p>
           <a:p>
-            <a:pPr indent="0" marL="0">
+            <a:pPr marL="0" indent="0">
               <a:buNone/>
             </a:pPr>
             <a:r>
@@ -4661,13 +5594,13 @@
             <a:endParaRPr lang="en-US" sz="1200" dirty="0"/>
           </a:p>
           <a:p>
-            <a:pPr indent="0" marL="0">
+            <a:pPr marL="0" indent="0">
               <a:buNone/>
             </a:pPr>
             <a:endParaRPr lang="en-US" sz="1200" dirty="0"/>
           </a:p>
           <a:p>
-            <a:pPr indent="0" marL="0">
+            <a:pPr marL="0" indent="0">
               <a:buNone/>
             </a:pPr>
             <a:r>
@@ -4751,7 +5684,7 @@
           <a:bodyPr wrap="square" rtlCol="0" anchor="ctr"/>
           <a:lstStyle/>
           <a:p>
-            <a:pPr indent="0" marL="0">
+            <a:pPr marL="0" indent="0">
               <a:buNone/>
             </a:pPr>
             <a:r>
@@ -4790,7 +5723,7 @@
           <a:bodyPr wrap="square" rtlCol="0" anchor="t"/>
           <a:lstStyle/>
           <a:p>
-            <a:pPr indent="0" marL="0">
+            <a:pPr marL="0" indent="0">
               <a:buNone/>
             </a:pPr>
             <a:r>
@@ -4804,9 +5737,6 @@
               </a:rPr>
               <a:t>Valor </a:t>
             </a:r>
-            <a:pPr indent="0" marL="0">
-              <a:buNone/>
-            </a:pPr>
             <a:r>
               <a:rPr lang="en-US" sz="1200" b="1" dirty="0">
                 <a:solidFill>
@@ -4818,9 +5748,6 @@
               </a:rPr>
               <a:t>derivado lógicamente</a:t>
             </a:r>
-            <a:pPr indent="0" marL="0">
-              <a:buNone/>
-            </a:pPr>
             <a:r>
               <a:rPr lang="en-US" sz="1200" dirty="0">
                 <a:solidFill>
@@ -4835,13 +5762,13 @@
             <a:endParaRPr lang="en-US" sz="1200" dirty="0"/>
           </a:p>
           <a:p>
-            <a:pPr indent="0" marL="0">
+            <a:pPr marL="0" indent="0">
               <a:buNone/>
             </a:pPr>
             <a:endParaRPr lang="en-US" sz="1200" dirty="0"/>
           </a:p>
           <a:p>
-            <a:pPr indent="0" marL="0">
+            <a:pPr marL="0" indent="0">
               <a:buNone/>
             </a:pPr>
             <a:r>
@@ -4858,13 +5785,13 @@
             <a:endParaRPr lang="en-US" sz="1200" dirty="0"/>
           </a:p>
           <a:p>
-            <a:pPr indent="0" marL="0">
+            <a:pPr marL="0" indent="0">
               <a:buNone/>
             </a:pPr>
             <a:endParaRPr lang="en-US" sz="1200" dirty="0"/>
           </a:p>
           <a:p>
-            <a:pPr indent="0" marL="0">
+            <a:pPr marL="0" indent="0">
               <a:buNone/>
             </a:pPr>
             <a:r>
@@ -4898,6 +5825,7 @@
         <a:solidFill>
           <a:srgbClr val="0B0F1A"/>
         </a:solidFill>
+        <a:effectLst/>
       </p:bgPr>
     </p:bg>
     <p:spTree>
@@ -4955,7 +5883,7 @@
           <a:bodyPr wrap="square" rtlCol="0" anchor="ctr"/>
           <a:lstStyle/>
           <a:p>
-            <a:pPr indent="0" marL="0">
+            <a:pPr marL="0" indent="0">
               <a:buNone/>
             </a:pPr>
             <a:r>
@@ -5019,7 +5947,7 @@
           <a:bodyPr wrap="square" rtlCol="0" anchor="ctr"/>
           <a:lstStyle/>
           <a:p>
-            <a:pPr indent="0" marL="0">
+            <a:pPr marL="0" indent="0">
               <a:buNone/>
             </a:pPr>
             <a:r>
@@ -5058,7 +5986,7 @@
           <a:bodyPr wrap="square" rtlCol="0" anchor="t"/>
           <a:lstStyle/>
           <a:p>
-            <a:pPr indent="0" marL="0">
+            <a:pPr marL="0" indent="0">
               <a:buNone/>
             </a:pPr>
             <a:r>
@@ -5072,9 +6000,6 @@
               </a:rPr>
               <a:t>Valores posibles: </a:t>
             </a:r>
-            <a:pPr indent="0" marL="0">
-              <a:buNone/>
-            </a:pPr>
             <a:r>
               <a:rPr lang="en-US" sz="1200" dirty="0">
                 <a:solidFill>
@@ -5087,9 +6012,6 @@
               <a:t>Verdadero (1) o Falso (0)  — sin valores intermedios.
 </a:t>
             </a:r>
-            <a:pPr indent="0" marL="0">
-              <a:buNone/>
-            </a:pPr>
             <a:r>
               <a:rPr lang="en-US" sz="1200" b="1" dirty="0">
                 <a:solidFill>
@@ -5101,9 +6023,6 @@
               </a:rPr>
               <a:t>Modelado de A ∈ [0,9]:  </a:t>
             </a:r>
-            <a:pPr indent="0" marL="0">
-              <a:buNone/>
-            </a:pPr>
             <a:r>
               <a:rPr lang="en-US" sz="1200" dirty="0">
                 <a:solidFill>
@@ -5116,9 +6035,6 @@
               <a:t>A₀ ∨ A₁ ∨ A₂ ∨ A₃ ∨ A₄ ∨ A₅ ∨ A₆ ∨ A₇ ∨ A₈ ∨ A₉
 </a:t>
             </a:r>
-            <a:pPr indent="0" marL="0">
-              <a:buNone/>
-            </a:pPr>
             <a:r>
               <a:rPr lang="en-US" sz="1200" dirty="0">
                 <a:solidFill>
@@ -5180,7 +6096,7 @@
           <a:bodyPr wrap="square" rtlCol="0" anchor="ctr"/>
           <a:lstStyle/>
           <a:p>
-            <a:pPr indent="0" marL="0">
+            <a:pPr marL="0" indent="0">
               <a:buNone/>
             </a:pPr>
             <a:r>
@@ -5219,7 +6135,7 @@
           <a:bodyPr wrap="square" rtlCol="0" anchor="t"/>
           <a:lstStyle/>
           <a:p>
-            <a:pPr indent="0" marL="0">
+            <a:pPr marL="0" indent="0">
               <a:buNone/>
             </a:pPr>
             <a:r>
@@ -5233,9 +6149,6 @@
               </a:rPr>
               <a:t>• Tablas de verdad: </a:t>
             </a:r>
-            <a:pPr indent="0" marL="0">
-              <a:buNone/>
-            </a:pPr>
             <a:r>
               <a:rPr lang="en-US" sz="1200" dirty="0">
                 <a:solidFill>
@@ -5248,9 +6161,6 @@
               <a:t>enumeración exhaustiva de todas las asignaciones posibles.
 </a:t>
             </a:r>
-            <a:pPr indent="0" marL="0">
-              <a:buNone/>
-            </a:pPr>
             <a:r>
               <a:rPr lang="en-US" sz="1200" b="1" dirty="0">
                 <a:solidFill>
@@ -5262,9 +6172,6 @@
               </a:rPr>
               <a:t>• Cláusulas de Horn + Encadenamiento: </a:t>
             </a:r>
-            <a:pPr indent="0" marL="0">
-              <a:buNone/>
-            </a:pPr>
             <a:r>
               <a:rPr lang="en-US" sz="1200" dirty="0">
                 <a:solidFill>
@@ -5277,9 +6184,6 @@
               <a:t>reglas con un único consecuente; permiten encadenamiento hacia adelante (modus ponens) y hacia atrás.
 </a:t>
             </a:r>
-            <a:pPr indent="0" marL="0">
-              <a:buNone/>
-            </a:pPr>
             <a:r>
               <a:rPr lang="en-US" sz="1200" b="1" dirty="0">
                 <a:solidFill>
@@ -5291,9 +6195,6 @@
               </a:rPr>
               <a:t>• Resolución: </a:t>
             </a:r>
-            <a:pPr indent="0" marL="0">
-              <a:buNone/>
-            </a:pPr>
             <a:r>
               <a:rPr lang="en-US" sz="1200" dirty="0">
                 <a:solidFill>
@@ -5325,6 +6226,7 @@
         <a:solidFill>
           <a:srgbClr val="0B0F1A"/>
         </a:solidFill>
+        <a:effectLst/>
       </p:bgPr>
     </p:bg>
     <p:spTree>
@@ -5382,7 +6284,7 @@
           <a:bodyPr wrap="square" rtlCol="0" anchor="ctr"/>
           <a:lstStyle/>
           <a:p>
-            <a:pPr indent="0" marL="0">
+            <a:pPr marL="0" indent="0">
               <a:buNone/>
             </a:pPr>
             <a:r>
@@ -5446,7 +6348,7 @@
           <a:bodyPr wrap="square" rtlCol="0" anchor="ctr"/>
           <a:lstStyle/>
           <a:p>
-            <a:pPr indent="0" marL="0">
+            <a:pPr marL="0" indent="0">
               <a:buNone/>
             </a:pPr>
             <a:r>
@@ -5485,7 +6387,7 @@
           <a:bodyPr wrap="square" rtlCol="0" anchor="t"/>
           <a:lstStyle/>
           <a:p>
-            <a:pPr indent="0" marL="0">
+            <a:pPr marL="0" indent="0">
               <a:buNone/>
             </a:pPr>
             <a:r>
@@ -5499,9 +6401,6 @@
               </a:rPr>
               <a:t>Valores posibles: </a:t>
             </a:r>
-            <a:pPr indent="0" marL="0">
-              <a:buNone/>
-            </a:pPr>
             <a:r>
               <a:rPr lang="en-US" sz="1200" dirty="0">
                 <a:solidFill>
@@ -5514,9 +6413,6 @@
               <a:t>Comparaciones, cuantificación, relaciones — permite trabajar con dominios continuos.
 </a:t>
             </a:r>
-            <a:pPr indent="0" marL="0">
-              <a:buNone/>
-            </a:pPr>
             <a:r>
               <a:rPr lang="en-US" sz="1200" b="1" dirty="0">
                 <a:solidFill>
@@ -5528,9 +6424,6 @@
               </a:rPr>
               <a:t>Modelado de A ∈ [0,9]:  </a:t>
             </a:r>
-            <a:pPr indent="0" marL="0">
-              <a:buNone/>
-            </a:pPr>
             <a:r>
               <a:rPr lang="en-US" sz="1200" dirty="0">
                 <a:solidFill>
@@ -5543,9 +6436,6 @@
               <a:t>A ≥ 0 ∧ A ≤ 9   |   ∃A ∈ [0, 9]
 </a:t>
             </a:r>
-            <a:pPr indent="0" marL="0">
-              <a:buNone/>
-            </a:pPr>
             <a:r>
               <a:rPr lang="en-US" sz="1200" dirty="0">
                 <a:solidFill>
@@ -5607,7 +6497,7 @@
           <a:bodyPr wrap="square" rtlCol="0" anchor="ctr"/>
           <a:lstStyle/>
           <a:p>
-            <a:pPr indent="0" marL="0">
+            <a:pPr marL="0" indent="0">
               <a:buNone/>
             </a:pPr>
             <a:r>
@@ -5646,7 +6536,7 @@
           <a:bodyPr wrap="square" rtlCol="0" anchor="t"/>
           <a:lstStyle/>
           <a:p>
-            <a:pPr indent="0" marL="0">
+            <a:pPr marL="0" indent="0">
               <a:buNone/>
             </a:pPr>
             <a:r>
@@ -5660,9 +6550,6 @@
               </a:rPr>
               <a:t>• Motores de inferencia </a:t>
             </a:r>
-            <a:pPr indent="0" marL="0">
-              <a:buNone/>
-            </a:pPr>
             <a:r>
               <a:rPr lang="en-US" sz="1200" dirty="0">
                 <a:solidFill>
@@ -5673,25 +6560,8 @@
                 <a:cs typeface="Calibri Light" pitchFamily="34" charset="-120"/>
               </a:rPr>
               <a:t>(Prolog, sistemas expertos): representan reglas y hechos, aplican unificación y resolución.
-</a:t>
-            </a:r>
-            <a:pPr indent="0" marL="0">
-              <a:buNone/>
-            </a:pPr>
-            <a:r>
-              <a:rPr lang="en-US" sz="1200" dirty="0">
-                <a:solidFill>
-                  <a:srgbClr val="C8D0E8"/>
-                </a:solidFill>
-                <a:latin typeface="Calibri Light" pitchFamily="34" charset="0"/>
-                <a:ea typeface="Calibri Light" pitchFamily="34" charset="-122"/>
-                <a:cs typeface="Calibri Light" pitchFamily="34" charset="-120"/>
-              </a:rPr>
-              <a:t>• Cualquier motor de inferencia está basado internamente en un algoritmo de búsqueda </a:t>
-            </a:r>
-            <a:pPr indent="0" marL="0">
-              <a:buNone/>
-            </a:pPr>
+• Cualquier motor de inferencia está basado internamente en un algoritmo de búsqueda </a:t>
+            </a:r>
             <a:r>
               <a:rPr lang="en-US" sz="1200" dirty="0">
                 <a:solidFill>
@@ -5723,6 +6593,7 @@
         <a:solidFill>
           <a:srgbClr val="0B0F1A"/>
         </a:solidFill>
+        <a:effectLst/>
       </p:bgPr>
     </p:bg>
     <p:spTree>
@@ -5780,7 +6651,7 @@
           <a:bodyPr wrap="square" rtlCol="0" anchor="ctr"/>
           <a:lstStyle/>
           <a:p>
-            <a:pPr indent="0" marL="0">
+            <a:pPr marL="0" indent="0">
               <a:buNone/>
             </a:pPr>
             <a:r>
@@ -5844,7 +6715,7 @@
           <a:bodyPr wrap="square" rtlCol="0" anchor="ctr"/>
           <a:lstStyle/>
           <a:p>
-            <a:pPr algn="ctr" indent="0" marL="0">
+            <a:pPr marL="0" indent="0" algn="ctr">
               <a:buNone/>
             </a:pPr>
             <a:r>
@@ -5908,7 +6779,7 @@
           <a:bodyPr wrap="square" rtlCol="0" anchor="ctr"/>
           <a:lstStyle/>
           <a:p>
-            <a:pPr indent="0" marL="0">
+            <a:pPr marL="0" indent="0">
               <a:buNone/>
             </a:pPr>
             <a:r>
@@ -5922,9 +6793,6 @@
               </a:rPr>
               <a:t>Definir estados:  </a:t>
             </a:r>
-            <a:pPr indent="0" marL="0">
-              <a:buNone/>
-            </a:pPr>
             <a:r>
               <a:rPr lang="en-US" sz="1200" dirty="0">
                 <a:solidFill>
@@ -5986,7 +6854,7 @@
           <a:bodyPr wrap="square" rtlCol="0" anchor="ctr"/>
           <a:lstStyle/>
           <a:p>
-            <a:pPr algn="ctr" indent="0" marL="0">
+            <a:pPr marL="0" indent="0" algn="ctr">
               <a:buNone/>
             </a:pPr>
             <a:r>
@@ -6050,7 +6918,7 @@
           <a:bodyPr wrap="square" rtlCol="0" anchor="ctr"/>
           <a:lstStyle/>
           <a:p>
-            <a:pPr indent="0" marL="0">
+            <a:pPr marL="0" indent="0">
               <a:buNone/>
             </a:pPr>
             <a:r>
@@ -6064,9 +6932,6 @@
               </a:rPr>
               <a:t>Definir frontera:  </a:t>
             </a:r>
-            <a:pPr indent="0" marL="0">
-              <a:buNone/>
-            </a:pPr>
             <a:r>
               <a:rPr lang="en-US" sz="1200" dirty="0">
                 <a:solidFill>
@@ -6128,7 +6993,7 @@
           <a:bodyPr wrap="square" rtlCol="0" anchor="ctr"/>
           <a:lstStyle/>
           <a:p>
-            <a:pPr algn="ctr" indent="0" marL="0">
+            <a:pPr marL="0" indent="0" algn="ctr">
               <a:buNone/>
             </a:pPr>
             <a:r>
@@ -6192,7 +7057,7 @@
           <a:bodyPr wrap="square" rtlCol="0" anchor="ctr"/>
           <a:lstStyle/>
           <a:p>
-            <a:pPr indent="0" marL="0">
+            <a:pPr marL="0" indent="0">
               <a:buNone/>
             </a:pPr>
             <a:r>
@@ -6206,9 +7071,6 @@
               </a:rPr>
               <a:t>Podar según precondiciones:  </a:t>
             </a:r>
-            <a:pPr indent="0" marL="0">
-              <a:buNone/>
-            </a:pPr>
             <a:r>
               <a:rPr lang="en-US" sz="1200" dirty="0">
                 <a:solidFill>
@@ -6270,7 +7132,7 @@
           <a:bodyPr wrap="square" rtlCol="0" anchor="ctr"/>
           <a:lstStyle/>
           <a:p>
-            <a:pPr algn="ctr" indent="0" marL="0">
+            <a:pPr marL="0" indent="0" algn="ctr">
               <a:buNone/>
             </a:pPr>
             <a:r>
@@ -6334,7 +7196,7 @@
           <a:bodyPr wrap="square" rtlCol="0" anchor="ctr"/>
           <a:lstStyle/>
           <a:p>
-            <a:pPr indent="0" marL="0">
+            <a:pPr marL="0" indent="0">
               <a:buNone/>
             </a:pPr>
             <a:r>
@@ -6348,9 +7210,6 @@
               </a:rPr>
               <a:t>Función de costo + heurística:  </a:t>
             </a:r>
-            <a:pPr indent="0" marL="0">
-              <a:buNone/>
-            </a:pPr>
             <a:r>
               <a:rPr lang="en-US" sz="1200" dirty="0">
                 <a:solidFill>
@@ -6412,7 +7271,7 @@
           <a:bodyPr wrap="square" rtlCol="0" anchor="ctr"/>
           <a:lstStyle/>
           <a:p>
-            <a:pPr algn="ctr" indent="0" marL="0">
+            <a:pPr marL="0" indent="0" algn="ctr">
               <a:buNone/>
             </a:pPr>
             <a:r>
@@ -6476,7 +7335,7 @@
           <a:bodyPr wrap="square" rtlCol="0" anchor="ctr"/>
           <a:lstStyle/>
           <a:p>
-            <a:pPr indent="0" marL="0">
+            <a:pPr marL="0" indent="0">
               <a:buNone/>
             </a:pPr>
             <a:r>
@@ -6490,9 +7349,6 @@
               </a:rPr>
               <a:t>Expandir sucesores:  </a:t>
             </a:r>
-            <a:pPr indent="0" marL="0">
-              <a:buNone/>
-            </a:pPr>
             <a:r>
               <a:rPr lang="en-US" sz="1200" dirty="0">
                 <a:solidFill>
@@ -6524,6 +7380,7 @@
         <a:solidFill>
           <a:srgbClr val="0B0F1A"/>
         </a:solidFill>
+        <a:effectLst/>
       </p:bgPr>
     </p:bg>
     <p:spTree>
@@ -6581,7 +7438,7 @@
           <a:bodyPr wrap="square" rtlCol="0" anchor="ctr"/>
           <a:lstStyle/>
           <a:p>
-            <a:pPr indent="0" marL="0">
+            <a:pPr marL="0" indent="0">
               <a:buNone/>
             </a:pPr>
             <a:r>
@@ -6599,30 +7456,6 @@
           </a:p>
         </p:txBody>
       </p:sp>
-      <p:pic>
-        <p:nvPicPr>
-          <p:cNvPr id="4" name="Image 0" descr="preencoded.png">    </p:cNvPr>
-          <p:cNvPicPr>
-            <a:picLocks noChangeAspect="1"/>
-          </p:cNvPicPr>
-          <p:nvPr/>
-        </p:nvPicPr>
-        <p:blipFill>
-          <a:blip r:embed="rId1"/>
-          <a:stretch>
-            <a:fillRect/>
-          </a:stretch>
-        </p:blipFill>
-        <p:spPr>
-          <a:xfrm>
-            <a:off x="274320" y="777240"/>
-            <a:ext cx="3474720" cy="3200400"/>
-          </a:xfrm>
-          <a:prstGeom prst="rect">
-            <a:avLst/>
-          </a:prstGeom>
-        </p:spPr>
-      </p:pic>
       <p:sp>
         <p:nvSpPr>
           <p:cNvPr id="5" name="Shape 2"/>
@@ -6631,8 +7464,8 @@
         </p:nvSpPr>
         <p:spPr>
           <a:xfrm>
-            <a:off x="4023360" y="777240"/>
-            <a:ext cx="4846320" cy="3200400"/>
+            <a:off x="3990342" y="777240"/>
+            <a:ext cx="4846320" cy="4201668"/>
           </a:xfrm>
           <a:prstGeom prst="rect">
             <a:avLst/>
@@ -6656,7 +7489,7 @@
         </p:nvSpPr>
         <p:spPr>
           <a:xfrm>
-            <a:off x="4206240" y="868680"/>
+            <a:off x="4136390" y="868680"/>
             <a:ext cx="4572000" cy="347472"/>
           </a:xfrm>
           <a:prstGeom prst="rect">
@@ -6669,7 +7502,7 @@
           <a:bodyPr wrap="square" rtlCol="0" anchor="ctr"/>
           <a:lstStyle/>
           <a:p>
-            <a:pPr indent="0" marL="0">
+            <a:pPr marL="0" indent="0">
               <a:buNone/>
             </a:pPr>
             <a:r>
@@ -6689,14 +7522,14 @@
       </p:sp>
       <p:sp>
         <p:nvSpPr>
-          <p:cNvPr id="7" name="Text 4"/>
-          <p:cNvSpPr/>
-          <p:nvPr/>
-        </p:nvSpPr>
-        <p:spPr>
-          <a:xfrm>
-            <a:off x="4206240" y="1280160"/>
-            <a:ext cx="4480560" cy="914400"/>
+          <p:cNvPr id="8" name="Text 5"/>
+          <p:cNvSpPr/>
+          <p:nvPr/>
+        </p:nvSpPr>
+        <p:spPr>
+          <a:xfrm>
+            <a:off x="4206240" y="2240280"/>
+            <a:ext cx="4572000" cy="320040"/>
           </a:xfrm>
           <a:prstGeom prst="rect">
             <a:avLst/>
@@ -6705,71 +7538,226 @@
           <a:ln/>
         </p:spPr>
         <p:txBody>
-          <a:bodyPr wrap="square" rtlCol="0" anchor="t"/>
-          <a:lstStyle/>
-          <a:p>
-            <a:pPr indent="0" marL="0">
-              <a:buNone/>
-            </a:pPr>
-            <a:r>
-              <a:rPr lang="en-US" sz="950" dirty="0">
-                <a:solidFill>
-                  <a:srgbClr val="D4C84A"/>
+          <a:bodyPr wrap="square" rtlCol="0" anchor="ctr"/>
+          <a:lstStyle/>
+          <a:p>
+            <a:pPr marL="0" indent="0">
+              <a:buNone/>
+            </a:pPr>
+            <a:r>
+              <a:rPr lang="en-US" sz="1200" b="1" dirty="0" err="1">
+                <a:solidFill>
+                  <a:srgbClr val="52C47A"/>
+                </a:solidFill>
+                <a:latin typeface="Calibri" pitchFamily="34" charset="0"/>
+                <a:ea typeface="Calibri" pitchFamily="34" charset="-122"/>
+                <a:cs typeface="Calibri" pitchFamily="34" charset="-120"/>
+              </a:rPr>
+              <a:t>Integración</a:t>
+            </a:r>
+            <a:endParaRPr lang="en-US" sz="1200" dirty="0"/>
+          </a:p>
+        </p:txBody>
+      </p:sp>
+      <p:sp>
+        <p:nvSpPr>
+          <p:cNvPr id="10" name="Text 7"/>
+          <p:cNvSpPr/>
+          <p:nvPr/>
+        </p:nvSpPr>
+        <p:spPr>
+          <a:xfrm>
+            <a:off x="4206240" y="3246120"/>
+            <a:ext cx="4572000" cy="320040"/>
+          </a:xfrm>
+          <a:prstGeom prst="rect">
+            <a:avLst/>
+          </a:prstGeom>
+          <a:noFill/>
+          <a:ln/>
+        </p:spPr>
+        <p:txBody>
+          <a:bodyPr wrap="square" rtlCol="0" anchor="ctr"/>
+          <a:lstStyle/>
+          <a:p>
+            <a:pPr marL="0" indent="0">
+              <a:buNone/>
+            </a:pPr>
+            <a:r>
+              <a:rPr lang="en-US" sz="1200" b="1" dirty="0">
+                <a:solidFill>
+                  <a:srgbClr val="8890A8"/>
+                </a:solidFill>
+                <a:latin typeface="Calibri" pitchFamily="34" charset="0"/>
+                <a:ea typeface="Calibri" pitchFamily="34" charset="-122"/>
+                <a:cs typeface="Calibri" pitchFamily="34" charset="-120"/>
+              </a:rPr>
+              <a:t>Variables del sistema</a:t>
+            </a:r>
+            <a:endParaRPr lang="en-US" sz="1200" dirty="0"/>
+          </a:p>
+        </p:txBody>
+      </p:sp>
+      <p:sp>
+        <p:nvSpPr>
+          <p:cNvPr id="11" name="Text 8"/>
+          <p:cNvSpPr/>
+          <p:nvPr/>
+        </p:nvSpPr>
+        <p:spPr>
+          <a:xfrm>
+            <a:off x="4206240" y="3611880"/>
+            <a:ext cx="4572000" cy="292608"/>
+          </a:xfrm>
+          <a:prstGeom prst="rect">
+            <a:avLst/>
+          </a:prstGeom>
+          <a:noFill/>
+          <a:ln/>
+        </p:spPr>
+        <p:txBody>
+          <a:bodyPr wrap="square" rtlCol="0" anchor="ctr"/>
+          <a:lstStyle/>
+          <a:p>
+            <a:pPr marL="0" indent="0">
+              <a:buNone/>
+            </a:pPr>
+            <a:r>
+              <a:rPr lang="en-US" sz="1100" b="1" dirty="0">
+                <a:solidFill>
+                  <a:srgbClr val="4A9EFF"/>
                 </a:solidFill>
                 <a:latin typeface="Consolas" pitchFamily="34" charset="0"/>
                 <a:ea typeface="Consolas" pitchFamily="34" charset="-122"/>
                 <a:cs typeface="Consolas" pitchFamily="34" charset="-120"/>
               </a:rPr>
-              <a:t>θ'' = [ g·sin(θ) + cos(θ)·(−F − m·l·θ'²·sin(θ)) / (M+m) ]</a:t>
-            </a:r>
-            <a:endParaRPr lang="en-US" sz="950" dirty="0"/>
-          </a:p>
-          <a:p>
-            <a:pPr indent="0" marL="0">
-              <a:buNone/>
-            </a:pPr>
-            <a:r>
-              <a:rPr lang="en-US" sz="950" dirty="0">
-                <a:solidFill>
-                  <a:srgbClr val="D4C84A"/>
+              <a:t>θ  </a:t>
+            </a:r>
+            <a:r>
+              <a:rPr lang="en-US" sz="1100" dirty="0">
+                <a:solidFill>
+                  <a:srgbClr val="C8D0E8"/>
+                </a:solidFill>
+                <a:latin typeface="Calibri Light" pitchFamily="34" charset="0"/>
+                <a:ea typeface="Calibri Light" pitchFamily="34" charset="-122"/>
+                <a:cs typeface="Calibri Light" pitchFamily="34" charset="-120"/>
+              </a:rPr>
+              <a:t>Ángulo del péndulo  [°]</a:t>
+            </a:r>
+            <a:endParaRPr lang="en-US" sz="1100" dirty="0"/>
+          </a:p>
+        </p:txBody>
+      </p:sp>
+      <p:sp>
+        <p:nvSpPr>
+          <p:cNvPr id="12" name="Text 9"/>
+          <p:cNvSpPr/>
+          <p:nvPr/>
+        </p:nvSpPr>
+        <p:spPr>
+          <a:xfrm>
+            <a:off x="4206240" y="3941064"/>
+            <a:ext cx="4572000" cy="292608"/>
+          </a:xfrm>
+          <a:prstGeom prst="rect">
+            <a:avLst/>
+          </a:prstGeom>
+          <a:noFill/>
+          <a:ln/>
+        </p:spPr>
+        <p:txBody>
+          <a:bodyPr wrap="square" rtlCol="0" anchor="ctr"/>
+          <a:lstStyle/>
+          <a:p>
+            <a:pPr marL="0" indent="0">
+              <a:buNone/>
+            </a:pPr>
+            <a:r>
+              <a:rPr lang="en-US" sz="1100" b="1" dirty="0">
+                <a:solidFill>
+                  <a:srgbClr val="4A9EFF"/>
                 </a:solidFill>
                 <a:latin typeface="Consolas" pitchFamily="34" charset="0"/>
                 <a:ea typeface="Consolas" pitchFamily="34" charset="-122"/>
                 <a:cs typeface="Consolas" pitchFamily="34" charset="-120"/>
               </a:rPr>
-              <a:t>         ────────────────────────────────────────────────────────</a:t>
-            </a:r>
-            <a:endParaRPr lang="en-US" sz="950" dirty="0"/>
-          </a:p>
-          <a:p>
-            <a:pPr indent="0" marL="0">
-              <a:buNone/>
-            </a:pPr>
-            <a:r>
-              <a:rPr lang="en-US" sz="950" dirty="0">
-                <a:solidFill>
-                  <a:srgbClr val="D4C84A"/>
+              <a:t>θ'  </a:t>
+            </a:r>
+            <a:r>
+              <a:rPr lang="en-US" sz="1100" dirty="0">
+                <a:solidFill>
+                  <a:srgbClr val="C8D0E8"/>
+                </a:solidFill>
+                <a:latin typeface="Calibri Light" pitchFamily="34" charset="0"/>
+                <a:ea typeface="Calibri Light" pitchFamily="34" charset="-122"/>
+                <a:cs typeface="Calibri Light" pitchFamily="34" charset="-120"/>
+              </a:rPr>
+              <a:t>Velocidad angular  [°/s]</a:t>
+            </a:r>
+            <a:endParaRPr lang="en-US" sz="1100" dirty="0"/>
+          </a:p>
+        </p:txBody>
+      </p:sp>
+      <p:sp>
+        <p:nvSpPr>
+          <p:cNvPr id="13" name="Text 10"/>
+          <p:cNvSpPr/>
+          <p:nvPr/>
+        </p:nvSpPr>
+        <p:spPr>
+          <a:xfrm>
+            <a:off x="4206240" y="4270248"/>
+            <a:ext cx="4572000" cy="292608"/>
+          </a:xfrm>
+          <a:prstGeom prst="rect">
+            <a:avLst/>
+          </a:prstGeom>
+          <a:noFill/>
+          <a:ln/>
+        </p:spPr>
+        <p:txBody>
+          <a:bodyPr wrap="square" rtlCol="0" anchor="ctr"/>
+          <a:lstStyle/>
+          <a:p>
+            <a:pPr marL="0" indent="0">
+              <a:buNone/>
+            </a:pPr>
+            <a:r>
+              <a:rPr lang="en-US" sz="1100" b="1" dirty="0">
+                <a:solidFill>
+                  <a:srgbClr val="4A9EFF"/>
                 </a:solidFill>
                 <a:latin typeface="Consolas" pitchFamily="34" charset="0"/>
                 <a:ea typeface="Consolas" pitchFamily="34" charset="-122"/>
                 <a:cs typeface="Consolas" pitchFamily="34" charset="-120"/>
               </a:rPr>
-              <a:t>         l · [ 4/3 − m·cos²(θ) / (M+m) ]</a:t>
-            </a:r>
-            <a:endParaRPr lang="en-US" sz="950" dirty="0"/>
-          </a:p>
-        </p:txBody>
-      </p:sp>
-      <p:sp>
-        <p:nvSpPr>
-          <p:cNvPr id="8" name="Text 5"/>
-          <p:cNvSpPr/>
-          <p:nvPr/>
-        </p:nvSpPr>
-        <p:spPr>
-          <a:xfrm>
-            <a:off x="4206240" y="2240280"/>
-            <a:ext cx="4572000" cy="320040"/>
+              <a:t>F  </a:t>
+            </a:r>
+            <a:r>
+              <a:rPr lang="en-US" sz="1100" dirty="0">
+                <a:solidFill>
+                  <a:srgbClr val="C8D0E8"/>
+                </a:solidFill>
+                <a:latin typeface="Calibri Light" pitchFamily="34" charset="0"/>
+                <a:ea typeface="Calibri Light" pitchFamily="34" charset="-122"/>
+                <a:cs typeface="Calibri Light" pitchFamily="34" charset="-120"/>
+              </a:rPr>
+              <a:t>Fuerza sobre el carro  [N]</a:t>
+            </a:r>
+            <a:endParaRPr lang="en-US" sz="1100" dirty="0"/>
+          </a:p>
+        </p:txBody>
+      </p:sp>
+      <p:sp>
+        <p:nvSpPr>
+          <p:cNvPr id="14" name="Text 11"/>
+          <p:cNvSpPr/>
+          <p:nvPr/>
+        </p:nvSpPr>
+        <p:spPr>
+          <a:xfrm>
+            <a:off x="4206240" y="4599432"/>
+            <a:ext cx="4572000" cy="292608"/>
           </a:xfrm>
           <a:prstGeom prst="rect">
             <a:avLst/>
@@ -6781,157 +7769,20 @@
           <a:bodyPr wrap="square" rtlCol="0" anchor="ctr"/>
           <a:lstStyle/>
           <a:p>
-            <a:pPr indent="0" marL="0">
-              <a:buNone/>
-            </a:pPr>
-            <a:r>
-              <a:rPr lang="en-US" sz="1200" b="1" dirty="0">
-                <a:solidFill>
-                  <a:srgbClr val="52C47A"/>
-                </a:solidFill>
-                <a:latin typeface="Calibri" pitchFamily="34" charset="0"/>
-                <a:ea typeface="Calibri" pitchFamily="34" charset="-122"/>
-                <a:cs typeface="Calibri" pitchFamily="34" charset="-120"/>
-              </a:rPr>
-              <a:t>Integración (Euler mejorado)</a:t>
-            </a:r>
-            <a:endParaRPr lang="en-US" sz="1200" dirty="0"/>
-          </a:p>
-        </p:txBody>
-      </p:sp>
-      <p:sp>
-        <p:nvSpPr>
-          <p:cNvPr id="9" name="Text 6"/>
-          <p:cNvSpPr/>
-          <p:nvPr/>
-        </p:nvSpPr>
-        <p:spPr>
-          <a:xfrm>
-            <a:off x="4206240" y="2606040"/>
-            <a:ext cx="4572000" cy="548640"/>
-          </a:xfrm>
-          <a:prstGeom prst="rect">
-            <a:avLst/>
-          </a:prstGeom>
-          <a:noFill/>
-          <a:ln/>
-        </p:spPr>
-        <p:txBody>
-          <a:bodyPr wrap="square" rtlCol="0" anchor="ctr"/>
-          <a:lstStyle/>
-          <a:p>
-            <a:pPr indent="0" marL="0">
-              <a:buNone/>
-            </a:pPr>
-            <a:r>
-              <a:rPr lang="en-US" sz="1100" dirty="0">
-                <a:solidFill>
-                  <a:srgbClr val="52C47A"/>
+            <a:pPr marL="0" indent="0">
+              <a:buNone/>
+            </a:pPr>
+            <a:r>
+              <a:rPr lang="en-US" sz="1100" b="1" dirty="0">
+                <a:solidFill>
+                  <a:srgbClr val="4A9EFF"/>
                 </a:solidFill>
                 <a:latin typeface="Consolas" pitchFamily="34" charset="0"/>
                 <a:ea typeface="Consolas" pitchFamily="34" charset="-122"/>
                 <a:cs typeface="Consolas" pitchFamily="34" charset="-120"/>
               </a:rPr>
-              <a:t>θ' ← θ' + θ''·Δt</a:t>
-            </a:r>
-            <a:endParaRPr lang="en-US" sz="1100" dirty="0"/>
-          </a:p>
-          <a:p>
-            <a:pPr indent="0" marL="0">
-              <a:buNone/>
-            </a:pPr>
-            <a:r>
-              <a:rPr lang="en-US" sz="1100" dirty="0">
-                <a:solidFill>
-                  <a:srgbClr val="52C47A"/>
-                </a:solidFill>
-                <a:latin typeface="Consolas" pitchFamily="34" charset="0"/>
-                <a:ea typeface="Consolas" pitchFamily="34" charset="-122"/>
-                <a:cs typeface="Consolas" pitchFamily="34" charset="-120"/>
-              </a:rPr>
-              <a:t>θ  ← θ + θ'·Δt + (θ''·Δt²)/2</a:t>
-            </a:r>
-            <a:endParaRPr lang="en-US" sz="1100" dirty="0"/>
-          </a:p>
-        </p:txBody>
-      </p:sp>
-      <p:sp>
-        <p:nvSpPr>
-          <p:cNvPr id="10" name="Text 7"/>
-          <p:cNvSpPr/>
-          <p:nvPr/>
-        </p:nvSpPr>
-        <p:spPr>
-          <a:xfrm>
-            <a:off x="4206240" y="3246120"/>
-            <a:ext cx="4572000" cy="320040"/>
-          </a:xfrm>
-          <a:prstGeom prst="rect">
-            <a:avLst/>
-          </a:prstGeom>
-          <a:noFill/>
-          <a:ln/>
-        </p:spPr>
-        <p:txBody>
-          <a:bodyPr wrap="square" rtlCol="0" anchor="ctr"/>
-          <a:lstStyle/>
-          <a:p>
-            <a:pPr indent="0" marL="0">
-              <a:buNone/>
-            </a:pPr>
-            <a:r>
-              <a:rPr lang="en-US" sz="1200" b="1" dirty="0">
-                <a:solidFill>
-                  <a:srgbClr val="8890A8"/>
-                </a:solidFill>
-                <a:latin typeface="Calibri" pitchFamily="34" charset="0"/>
-                <a:ea typeface="Calibri" pitchFamily="34" charset="-122"/>
-                <a:cs typeface="Calibri" pitchFamily="34" charset="-120"/>
-              </a:rPr>
-              <a:t>Variables del sistema</a:t>
-            </a:r>
-            <a:endParaRPr lang="en-US" sz="1200" dirty="0"/>
-          </a:p>
-        </p:txBody>
-      </p:sp>
-      <p:sp>
-        <p:nvSpPr>
-          <p:cNvPr id="11" name="Text 8"/>
-          <p:cNvSpPr/>
-          <p:nvPr/>
-        </p:nvSpPr>
-        <p:spPr>
-          <a:xfrm>
-            <a:off x="4206240" y="3611880"/>
-            <a:ext cx="4572000" cy="292608"/>
-          </a:xfrm>
-          <a:prstGeom prst="rect">
-            <a:avLst/>
-          </a:prstGeom>
-          <a:noFill/>
-          <a:ln/>
-        </p:spPr>
-        <p:txBody>
-          <a:bodyPr wrap="square" rtlCol="0" anchor="ctr"/>
-          <a:lstStyle/>
-          <a:p>
-            <a:pPr indent="0" marL="0">
-              <a:buNone/>
-            </a:pPr>
-            <a:r>
-              <a:rPr lang="en-US" sz="1100" b="1" dirty="0">
-                <a:solidFill>
-                  <a:srgbClr val="4A9EFF"/>
-                </a:solidFill>
-                <a:latin typeface="Consolas" pitchFamily="34" charset="0"/>
-                <a:ea typeface="Consolas" pitchFamily="34" charset="-122"/>
-                <a:cs typeface="Consolas" pitchFamily="34" charset="-120"/>
-              </a:rPr>
-              <a:t>θ  </a:t>
-            </a:r>
-            <a:pPr indent="0" marL="0">
-              <a:buNone/>
-            </a:pPr>
+              <a:t>M=3 kg, m=1 kg, l=1 m  </a:t>
+            </a:r>
             <a:r>
               <a:rPr lang="en-US" sz="1100" dirty="0">
                 <a:solidFill>
@@ -6941,210 +7792,102 @@
                 <a:ea typeface="Calibri Light" pitchFamily="34" charset="-122"/>
                 <a:cs typeface="Calibri Light" pitchFamily="34" charset="-120"/>
               </a:rPr>
-              <a:t>Ángulo del péndulo  [°]</a:t>
+              <a:t>Parámetros físicos</a:t>
             </a:r>
             <a:endParaRPr lang="en-US" sz="1100" dirty="0"/>
           </a:p>
         </p:txBody>
       </p:sp>
-      <p:sp>
-        <p:nvSpPr>
-          <p:cNvPr id="12" name="Text 9"/>
-          <p:cNvSpPr/>
-          <p:nvPr/>
-        </p:nvSpPr>
-        <p:spPr>
-          <a:xfrm>
-            <a:off x="4206240" y="3941064"/>
-            <a:ext cx="4572000" cy="292608"/>
-          </a:xfrm>
-          <a:prstGeom prst="rect">
-            <a:avLst/>
-          </a:prstGeom>
-          <a:noFill/>
-          <a:ln/>
-        </p:spPr>
-        <p:txBody>
-          <a:bodyPr wrap="square" rtlCol="0" anchor="ctr"/>
-          <a:lstStyle/>
-          <a:p>
-            <a:pPr indent="0" marL="0">
-              <a:buNone/>
-            </a:pPr>
-            <a:r>
-              <a:rPr lang="en-US" sz="1100" b="1" dirty="0">
-                <a:solidFill>
-                  <a:srgbClr val="4A9EFF"/>
-                </a:solidFill>
-                <a:latin typeface="Consolas" pitchFamily="34" charset="0"/>
-                <a:ea typeface="Consolas" pitchFamily="34" charset="-122"/>
-                <a:cs typeface="Consolas" pitchFamily="34" charset="-120"/>
-              </a:rPr>
-              <a:t>θ'  </a:t>
-            </a:r>
-            <a:pPr indent="0" marL="0">
-              <a:buNone/>
-            </a:pPr>
-            <a:r>
-              <a:rPr lang="en-US" sz="1100" dirty="0">
-                <a:solidFill>
-                  <a:srgbClr val="C8D0E8"/>
-                </a:solidFill>
-                <a:latin typeface="Calibri Light" pitchFamily="34" charset="0"/>
-                <a:ea typeface="Calibri Light" pitchFamily="34" charset="-122"/>
-                <a:cs typeface="Calibri Light" pitchFamily="34" charset="-120"/>
-              </a:rPr>
-              <a:t>Velocidad angular  [°/s]</a:t>
-            </a:r>
-            <a:endParaRPr lang="en-US" sz="1100" dirty="0"/>
-          </a:p>
-        </p:txBody>
-      </p:sp>
-      <p:sp>
-        <p:nvSpPr>
-          <p:cNvPr id="13" name="Text 10"/>
-          <p:cNvSpPr/>
-          <p:nvPr/>
-        </p:nvSpPr>
-        <p:spPr>
-          <a:xfrm>
-            <a:off x="4206240" y="4270248"/>
-            <a:ext cx="4572000" cy="292608"/>
-          </a:xfrm>
-          <a:prstGeom prst="rect">
-            <a:avLst/>
-          </a:prstGeom>
-          <a:noFill/>
-          <a:ln/>
-        </p:spPr>
-        <p:txBody>
-          <a:bodyPr wrap="square" rtlCol="0" anchor="ctr"/>
-          <a:lstStyle/>
-          <a:p>
-            <a:pPr indent="0" marL="0">
-              <a:buNone/>
-            </a:pPr>
-            <a:r>
-              <a:rPr lang="en-US" sz="1100" b="1" dirty="0">
-                <a:solidFill>
-                  <a:srgbClr val="4A9EFF"/>
-                </a:solidFill>
-                <a:latin typeface="Consolas" pitchFamily="34" charset="0"/>
-                <a:ea typeface="Consolas" pitchFamily="34" charset="-122"/>
-                <a:cs typeface="Consolas" pitchFamily="34" charset="-120"/>
-              </a:rPr>
-              <a:t>F  </a:t>
-            </a:r>
-            <a:pPr indent="0" marL="0">
-              <a:buNone/>
-            </a:pPr>
-            <a:r>
-              <a:rPr lang="en-US" sz="1100" dirty="0">
-                <a:solidFill>
-                  <a:srgbClr val="C8D0E8"/>
-                </a:solidFill>
-                <a:latin typeface="Calibri Light" pitchFamily="34" charset="0"/>
-                <a:ea typeface="Calibri Light" pitchFamily="34" charset="-122"/>
-                <a:cs typeface="Calibri Light" pitchFamily="34" charset="-120"/>
-              </a:rPr>
-              <a:t>Fuerza sobre el carro  [N]</a:t>
-            </a:r>
-            <a:endParaRPr lang="en-US" sz="1100" dirty="0"/>
-          </a:p>
-        </p:txBody>
-      </p:sp>
-      <p:sp>
-        <p:nvSpPr>
-          <p:cNvPr id="14" name="Text 11"/>
-          <p:cNvSpPr/>
-          <p:nvPr/>
-        </p:nvSpPr>
-        <p:spPr>
-          <a:xfrm>
-            <a:off x="4206240" y="4599432"/>
-            <a:ext cx="4572000" cy="292608"/>
-          </a:xfrm>
-          <a:prstGeom prst="rect">
-            <a:avLst/>
-          </a:prstGeom>
-          <a:noFill/>
-          <a:ln/>
-        </p:spPr>
-        <p:txBody>
-          <a:bodyPr wrap="square" rtlCol="0" anchor="ctr"/>
-          <a:lstStyle/>
-          <a:p>
-            <a:pPr indent="0" marL="0">
-              <a:buNone/>
-            </a:pPr>
-            <a:r>
-              <a:rPr lang="en-US" sz="1100" b="1" dirty="0">
-                <a:solidFill>
-                  <a:srgbClr val="4A9EFF"/>
-                </a:solidFill>
-                <a:latin typeface="Consolas" pitchFamily="34" charset="0"/>
-                <a:ea typeface="Consolas" pitchFamily="34" charset="-122"/>
-                <a:cs typeface="Consolas" pitchFamily="34" charset="-120"/>
-              </a:rPr>
-              <a:t>M=3 kg, m=1 kg, l=1 m  </a:t>
-            </a:r>
-            <a:pPr indent="0" marL="0">
-              <a:buNone/>
-            </a:pPr>
-            <a:r>
-              <a:rPr lang="en-US" sz="1100" dirty="0">
-                <a:solidFill>
-                  <a:srgbClr val="C8D0E8"/>
-                </a:solidFill>
-                <a:latin typeface="Calibri Light" pitchFamily="34" charset="0"/>
-                <a:ea typeface="Calibri Light" pitchFamily="34" charset="-122"/>
-                <a:cs typeface="Calibri Light" pitchFamily="34" charset="-120"/>
-              </a:rPr>
-              <a:t>Parámetros físicos</a:t>
-            </a:r>
-            <a:endParaRPr lang="en-US" sz="1100" dirty="0"/>
-          </a:p>
-        </p:txBody>
-      </p:sp>
-      <p:sp>
-        <p:nvSpPr>
-          <p:cNvPr id="15" name="Text 12"/>
-          <p:cNvSpPr/>
-          <p:nvPr/>
-        </p:nvSpPr>
-        <p:spPr>
-          <a:xfrm>
-            <a:off x="274320" y="4709160"/>
-            <a:ext cx="8595360" cy="292608"/>
-          </a:xfrm>
-          <a:prstGeom prst="rect">
-            <a:avLst/>
-          </a:prstGeom>
-          <a:noFill/>
-          <a:ln/>
-        </p:spPr>
-        <p:txBody>
-          <a:bodyPr wrap="square" rtlCol="0" anchor="ctr"/>
-          <a:lstStyle/>
-          <a:p>
-            <a:pPr indent="0" marL="0">
-              <a:buNone/>
-            </a:pPr>
-            <a:r>
-              <a:rPr lang="en-US" sz="1000" i="1" dirty="0">
-                <a:solidFill>
-                  <a:srgbClr val="8890A8"/>
-                </a:solidFill>
-                <a:latin typeface="Calibri Light" pitchFamily="34" charset="0"/>
-                <a:ea typeface="Calibri Light" pitchFamily="34" charset="-122"/>
-                <a:cs typeface="Calibri Light" pitchFamily="34" charset="-120"/>
-              </a:rPr>
-              <a:t>Δt = 0.001 s  |  Carro sin espacio restringido</a:t>
-            </a:r>
-            <a:endParaRPr lang="en-US" sz="1000" dirty="0"/>
-          </a:p>
-        </p:txBody>
-      </p:sp>
+      <p:pic>
+        <p:nvPicPr>
+          <p:cNvPr id="17" name="Imagen 16">
+            <a:extLst>
+              <a:ext uri="{FF2B5EF4-FFF2-40B4-BE49-F238E27FC236}">
+                <a16:creationId xmlns:a16="http://schemas.microsoft.com/office/drawing/2014/main" id="{780EDC87-7C86-4AF8-B2CD-BB0DD0B2D745}"/>
+              </a:ext>
+            </a:extLst>
+          </p:cNvPr>
+          <p:cNvPicPr>
+            <a:picLocks noChangeAspect="1"/>
+          </p:cNvPicPr>
+          <p:nvPr/>
+        </p:nvPicPr>
+        <p:blipFill>
+          <a:blip r:embed="rId3"/>
+          <a:stretch>
+            <a:fillRect/>
+          </a:stretch>
+        </p:blipFill>
+        <p:spPr>
+          <a:xfrm>
+            <a:off x="159848" y="843280"/>
+            <a:ext cx="3772072" cy="2962325"/>
+          </a:xfrm>
+          <a:prstGeom prst="rect">
+            <a:avLst/>
+          </a:prstGeom>
+        </p:spPr>
+      </p:pic>
+      <p:pic>
+        <p:nvPicPr>
+          <p:cNvPr id="19" name="Imagen 18">
+            <a:extLst>
+              <a:ext uri="{FF2B5EF4-FFF2-40B4-BE49-F238E27FC236}">
+                <a16:creationId xmlns:a16="http://schemas.microsoft.com/office/drawing/2014/main" id="{D4729F8D-E25C-4FF5-8C59-739D33AB6A98}"/>
+              </a:ext>
+            </a:extLst>
+          </p:cNvPr>
+          <p:cNvPicPr>
+            <a:picLocks noChangeAspect="1"/>
+          </p:cNvPicPr>
+          <p:nvPr/>
+        </p:nvPicPr>
+        <p:blipFill>
+          <a:blip r:embed="rId4"/>
+          <a:stretch>
+            <a:fillRect/>
+          </a:stretch>
+        </p:blipFill>
+        <p:spPr>
+          <a:xfrm>
+            <a:off x="4448608" y="1195669"/>
+            <a:ext cx="2849295" cy="1080227"/>
+          </a:xfrm>
+          <a:prstGeom prst="rect">
+            <a:avLst/>
+          </a:prstGeom>
+        </p:spPr>
+      </p:pic>
+      <p:pic>
+        <p:nvPicPr>
+          <p:cNvPr id="21" name="Imagen 20">
+            <a:extLst>
+              <a:ext uri="{FF2B5EF4-FFF2-40B4-BE49-F238E27FC236}">
+                <a16:creationId xmlns:a16="http://schemas.microsoft.com/office/drawing/2014/main" id="{ACA203B9-830F-4CD4-AD71-8BBC983E9A52}"/>
+              </a:ext>
+            </a:extLst>
+          </p:cNvPr>
+          <p:cNvPicPr>
+            <a:picLocks noChangeAspect="1"/>
+          </p:cNvPicPr>
+          <p:nvPr/>
+        </p:nvPicPr>
+        <p:blipFill>
+          <a:blip r:embed="rId5"/>
+          <a:stretch>
+            <a:fillRect/>
+          </a:stretch>
+        </p:blipFill>
+        <p:spPr>
+          <a:xfrm>
+            <a:off x="4362450" y="2524089"/>
+            <a:ext cx="2743553" cy="624004"/>
+          </a:xfrm>
+          <a:prstGeom prst="rect">
+            <a:avLst/>
+          </a:prstGeom>
+        </p:spPr>
+      </p:pic>
     </p:spTree>
   </p:cSld>
   <p:clrMapOvr>
@@ -7161,6 +7904,7 @@
         <a:solidFill>
           <a:srgbClr val="0B0F1A"/>
         </a:solidFill>
+        <a:effectLst/>
       </p:bgPr>
     </p:bg>
     <p:spTree>
@@ -7218,7 +7962,7 @@
           <a:bodyPr wrap="square" rtlCol="0" anchor="ctr"/>
           <a:lstStyle/>
           <a:p>
-            <a:pPr indent="0" marL="0">
+            <a:pPr marL="0" indent="0">
               <a:buNone/>
             </a:pPr>
             <a:r>
@@ -7238,14 +7982,14 @@
       </p:sp>
       <p:pic>
         <p:nvPicPr>
-          <p:cNvPr id="4" name="Image 0" descr="preencoded.png">    </p:cNvPr>
+          <p:cNvPr id="4" name="Image 0" descr="preencoded.png"/>
           <p:cNvPicPr>
             <a:picLocks noChangeAspect="1"/>
           </p:cNvPicPr>
           <p:nvPr/>
         </p:nvPicPr>
         <p:blipFill>
-          <a:blip r:embed="rId1"/>
+          <a:blip r:embed="rId3"/>
           <a:stretch>
             <a:fillRect/>
           </a:stretch>
@@ -7281,7 +8025,7 @@
           <a:bodyPr wrap="square" rtlCol="0" anchor="ctr"/>
           <a:lstStyle/>
           <a:p>
-            <a:pPr indent="0" marL="0">
+            <a:pPr marL="0" indent="0">
               <a:buNone/>
             </a:pPr>
             <a:r>
@@ -7345,7 +8089,7 @@
           <a:bodyPr wrap="square" rtlCol="0" anchor="ctr"/>
           <a:lstStyle/>
           <a:p>
-            <a:pPr indent="0" marL="0">
+            <a:pPr marL="0" indent="0">
               <a:buNone/>
             </a:pPr>
             <a:r>
@@ -7359,9 +8103,6 @@
               </a:rPr>
               <a:t>Conjunción (∧):  </a:t>
             </a:r>
-            <a:pPr indent="0" marL="0">
-              <a:buNone/>
-            </a:pPr>
             <a:r>
               <a:rPr lang="en-US" sz="1100" dirty="0">
                 <a:solidFill>
@@ -7423,7 +8164,7 @@
           <a:bodyPr wrap="square" rtlCol="0" anchor="ctr"/>
           <a:lstStyle/>
           <a:p>
-            <a:pPr indent="0" marL="0">
+            <a:pPr marL="0" indent="0">
               <a:buNone/>
             </a:pPr>
             <a:r>
@@ -7437,9 +8178,6 @@
               </a:rPr>
               <a:t>Disyunción (∨):  </a:t>
             </a:r>
-            <a:pPr indent="0" marL="0">
-              <a:buNone/>
-            </a:pPr>
             <a:r>
               <a:rPr lang="en-US" sz="1100" dirty="0">
                 <a:solidFill>
@@ -7501,7 +8239,7 @@
           <a:bodyPr wrap="square" rtlCol="0" anchor="ctr"/>
           <a:lstStyle/>
           <a:p>
-            <a:pPr indent="0" marL="0">
+            <a:pPr marL="0" indent="0">
               <a:buNone/>
             </a:pPr>
             <a:r>
@@ -7515,9 +8253,6 @@
               </a:rPr>
               <a:t>Implicación:  </a:t>
             </a:r>
-            <a:pPr indent="0" marL="0">
-              <a:buNone/>
-            </a:pPr>
             <a:r>
               <a:rPr lang="en-US" sz="1100" dirty="0">
                 <a:solidFill>
@@ -7579,7 +8314,7 @@
           <a:bodyPr wrap="square" rtlCol="0" anchor="ctr"/>
           <a:lstStyle/>
           <a:p>
-            <a:pPr indent="0" marL="0">
+            <a:pPr marL="0" indent="0">
               <a:buNone/>
             </a:pPr>
             <a:r>
@@ -7593,9 +8328,6 @@
               </a:rPr>
               <a:t>Defuzzificación:  </a:t>
             </a:r>
-            <a:pPr indent="0" marL="0">
-              <a:buNone/>
-            </a:pPr>
             <a:r>
               <a:rPr lang="en-US" sz="1100" dirty="0">
                 <a:solidFill>
@@ -7627,6 +8359,7 @@
         <a:solidFill>
           <a:srgbClr val="0B0F1A"/>
         </a:solidFill>
+        <a:effectLst/>
       </p:bgPr>
     </p:bg>
     <p:spTree>
@@ -7684,7 +8417,7 @@
           <a:bodyPr wrap="square" rtlCol="0" anchor="ctr"/>
           <a:lstStyle/>
           <a:p>
-            <a:pPr indent="0" marL="0">
+            <a:pPr marL="0" indent="0">
               <a:buNone/>
             </a:pPr>
             <a:r>
@@ -7704,14 +8437,14 @@
       </p:sp>
       <p:pic>
         <p:nvPicPr>
-          <p:cNvPr id="4" name="Image 0" descr="preencoded.png">    </p:cNvPr>
+          <p:cNvPr id="4" name="Image 0" descr="preencoded.png"/>
           <p:cNvPicPr>
             <a:picLocks noChangeAspect="1"/>
           </p:cNvPicPr>
           <p:nvPr/>
         </p:nvPicPr>
         <p:blipFill>
-          <a:blip r:embed="rId1"/>
+          <a:blip r:embed="rId3"/>
           <a:stretch>
             <a:fillRect/>
           </a:stretch>
@@ -7772,7 +8505,7 @@
           <a:bodyPr wrap="square" rtlCol="0" anchor="ctr"/>
           <a:lstStyle/>
           <a:p>
-            <a:pPr indent="0" marL="0">
+            <a:pPr marL="0" indent="0">
               <a:buNone/>
             </a:pPr>
             <a:r>
@@ -7811,7 +8544,7 @@
           <a:bodyPr wrap="square" rtlCol="0" anchor="t"/>
           <a:lstStyle/>
           <a:p>
-            <a:pPr indent="0" marL="0">
+            <a:pPr marL="0" indent="0">
               <a:buNone/>
             </a:pPr>
             <a:r>
@@ -7825,9 +8558,6 @@
               </a:rPr>
               <a:t>Rango: </a:t>
             </a:r>
-            <a:pPr indent="0" marL="0">
-              <a:buNone/>
-            </a:pPr>
             <a:r>
               <a:rPr lang="en-US" sz="1000" dirty="0">
                 <a:solidFill>
@@ -7840,9 +8570,6 @@
               <a:t>[−180°, 180°]
 </a:t>
             </a:r>
-            <a:pPr indent="0" marL="0">
-              <a:buNone/>
-            </a:pPr>
             <a:r>
               <a:rPr lang="en-US" sz="1000" dirty="0">
                 <a:solidFill>
@@ -7904,7 +8631,7 @@
           <a:bodyPr wrap="square" rtlCol="0" anchor="ctr"/>
           <a:lstStyle/>
           <a:p>
-            <a:pPr indent="0" marL="0">
+            <a:pPr marL="0" indent="0">
               <a:buNone/>
             </a:pPr>
             <a:r>
@@ -7943,7 +8670,7 @@
           <a:bodyPr wrap="square" rtlCol="0" anchor="t"/>
           <a:lstStyle/>
           <a:p>
-            <a:pPr indent="0" marL="0">
+            <a:pPr marL="0" indent="0">
               <a:buNone/>
             </a:pPr>
             <a:r>
@@ -7957,9 +8684,6 @@
               </a:rPr>
               <a:t>Rango: </a:t>
             </a:r>
-            <a:pPr indent="0" marL="0">
-              <a:buNone/>
-            </a:pPr>
             <a:r>
               <a:rPr lang="en-US" sz="1000" dirty="0">
                 <a:solidFill>
@@ -7972,9 +8696,6 @@
               <a:t>[−90, 90] °/s
 </a:t>
             </a:r>
-            <a:pPr indent="0" marL="0">
-              <a:buNone/>
-            </a:pPr>
             <a:r>
               <a:rPr lang="en-US" sz="1000" dirty="0">
                 <a:solidFill>
@@ -8036,7 +8757,7 @@
           <a:bodyPr wrap="square" rtlCol="0" anchor="ctr"/>
           <a:lstStyle/>
           <a:p>
-            <a:pPr indent="0" marL="0">
+            <a:pPr marL="0" indent="0">
               <a:buNone/>
             </a:pPr>
             <a:r>
@@ -8075,7 +8796,7 @@
           <a:bodyPr wrap="square" rtlCol="0" anchor="t"/>
           <a:lstStyle/>
           <a:p>
-            <a:pPr indent="0" marL="0">
+            <a:pPr marL="0" indent="0">
               <a:buNone/>
             </a:pPr>
             <a:r>
@@ -8089,9 +8810,6 @@
               </a:rPr>
               <a:t>Rango: </a:t>
             </a:r>
-            <a:pPr indent="0" marL="0">
-              <a:buNone/>
-            </a:pPr>
             <a:r>
               <a:rPr lang="en-US" sz="1000" dirty="0">
                 <a:solidFill>
@@ -8104,9 +8822,6 @@
               <a:t>[−300, 300] N
 </a:t>
             </a:r>
-            <a:pPr indent="0" marL="0">
-              <a:buNone/>
-            </a:pPr>
             <a:r>
               <a:rPr lang="en-US" sz="1000" dirty="0">
                 <a:solidFill>
@@ -8130,8 +8845,8 @@
         </p:nvSpPr>
         <p:spPr>
           <a:xfrm>
-            <a:off x="274320" y="4828032"/>
-            <a:ext cx="8595360" cy="256032"/>
+            <a:off x="5283681" y="306324"/>
+            <a:ext cx="3284247" cy="256032"/>
           </a:xfrm>
           <a:prstGeom prst="rect">
             <a:avLst/>
@@ -8143,13 +8858,13 @@
           <a:bodyPr wrap="square" rtlCol="0" anchor="ctr"/>
           <a:lstStyle/>
           <a:p>
-            <a:pPr algn="ctr" indent="0" marL="0">
+            <a:pPr marL="0" indent="0" algn="ctr">
               <a:buNone/>
             </a:pPr>
             <a:r>
               <a:rPr lang="en-US" sz="1100" dirty="0">
                 <a:solidFill>
-                  <a:srgbClr val="8890A8"/>
+                  <a:schemeClr val="bg1"/>
                 </a:solidFill>
                 <a:latin typeface="Calibri Light" pitchFamily="34" charset="0"/>
                 <a:ea typeface="Calibri Light" pitchFamily="34" charset="-122"/>
@@ -8157,7 +8872,11 @@
               </a:rPr>
               <a:t>7 conjuntos: NGG — NG — NP — Z — PP — PG — PGG</a:t>
             </a:r>
-            <a:endParaRPr lang="en-US" sz="1100" dirty="0"/>
+            <a:endParaRPr lang="en-US" sz="1100" dirty="0">
+              <a:solidFill>
+                <a:schemeClr val="bg1"/>
+              </a:solidFill>
+            </a:endParaRPr>
           </a:p>
         </p:txBody>
       </p:sp>
@@ -8462,4 +9181,299 @@
     </a:ext>
   </a:extLst>
 </a:theme>
+</file>
+
+<file path=ppt/theme/theme2.xml><?xml version="1.0" encoding="utf-8"?>
+<a:theme xmlns:a="http://schemas.openxmlformats.org/drawingml/2006/main" name="Tema de Office">
+  <a:themeElements>
+    <a:clrScheme name="Office">
+      <a:dk1>
+        <a:sysClr val="windowText" lastClr="000000"/>
+      </a:dk1>
+      <a:lt1>
+        <a:sysClr val="window" lastClr="FFFFFF"/>
+      </a:lt1>
+      <a:dk2>
+        <a:srgbClr val="44546A"/>
+      </a:dk2>
+      <a:lt2>
+        <a:srgbClr val="E7E6E6"/>
+      </a:lt2>
+      <a:accent1>
+        <a:srgbClr val="4472C4"/>
+      </a:accent1>
+      <a:accent2>
+        <a:srgbClr val="ED7D31"/>
+      </a:accent2>
+      <a:accent3>
+        <a:srgbClr val="A5A5A5"/>
+      </a:accent3>
+      <a:accent4>
+        <a:srgbClr val="FFC000"/>
+      </a:accent4>
+      <a:accent5>
+        <a:srgbClr val="5B9BD5"/>
+      </a:accent5>
+      <a:accent6>
+        <a:srgbClr val="70AD47"/>
+      </a:accent6>
+      <a:hlink>
+        <a:srgbClr val="0563C1"/>
+      </a:hlink>
+      <a:folHlink>
+        <a:srgbClr val="954F72"/>
+      </a:folHlink>
+    </a:clrScheme>
+    <a:fontScheme name="Office">
+      <a:majorFont>
+        <a:latin typeface="Calibri Light" panose="020F0302020204030204"/>
+        <a:ea typeface=""/>
+        <a:cs typeface=""/>
+        <a:font script="Jpan" typeface="游ゴシック Light"/>
+        <a:font script="Hang" typeface="맑은 고딕"/>
+        <a:font script="Hans" typeface="等线 Light"/>
+        <a:font script="Hant" typeface="新細明體"/>
+        <a:font script="Arab" typeface="Times New Roman"/>
+        <a:font script="Hebr" typeface="Times New Roman"/>
+        <a:font script="Thai" typeface="Angsana New"/>
+        <a:font script="Ethi" typeface="Nyala"/>
+        <a:font script="Beng" typeface="Vrinda"/>
+        <a:font script="Gujr" typeface="Shruti"/>
+        <a:font script="Khmr" typeface="MoolBoran"/>
+        <a:font script="Knda" typeface="Tunga"/>
+        <a:font script="Guru" typeface="Raavi"/>
+        <a:font script="Cans" typeface="Euphemia"/>
+        <a:font script="Cher" typeface="Plantagenet Cherokee"/>
+        <a:font script="Yiii" typeface="Microsoft Yi Baiti"/>
+        <a:font script="Tibt" typeface="Microsoft Himalaya"/>
+        <a:font script="Thaa" typeface="MV Boli"/>
+        <a:font script="Deva" typeface="Mangal"/>
+        <a:font script="Telu" typeface="Gautami"/>
+        <a:font script="Taml" typeface="Latha"/>
+        <a:font script="Syrc" typeface="Estrangelo Edessa"/>
+        <a:font script="Orya" typeface="Kalinga"/>
+        <a:font script="Mlym" typeface="Kartika"/>
+        <a:font script="Laoo" typeface="DokChampa"/>
+        <a:font script="Sinh" typeface="Iskoola Pota"/>
+        <a:font script="Mong" typeface="Mongolian Baiti"/>
+        <a:font script="Viet" typeface="Times New Roman"/>
+        <a:font script="Uigh" typeface="Microsoft Uighur"/>
+        <a:font script="Geor" typeface="Sylfaen"/>
+        <a:font script="Armn" typeface="Arial"/>
+        <a:font script="Bugi" typeface="Leelawadee UI"/>
+        <a:font script="Bopo" typeface="Microsoft JhengHei"/>
+        <a:font script="Java" typeface="Javanese Text"/>
+        <a:font script="Lisu" typeface="Segoe UI"/>
+        <a:font script="Mymr" typeface="Myanmar Text"/>
+        <a:font script="Nkoo" typeface="Ebrima"/>
+        <a:font script="Olck" typeface="Nirmala UI"/>
+        <a:font script="Osma" typeface="Ebrima"/>
+        <a:font script="Phag" typeface="Phagspa"/>
+        <a:font script="Syrn" typeface="Estrangelo Edessa"/>
+        <a:font script="Syrj" typeface="Estrangelo Edessa"/>
+        <a:font script="Syre" typeface="Estrangelo Edessa"/>
+        <a:font script="Sora" typeface="Nirmala UI"/>
+        <a:font script="Tale" typeface="Microsoft Tai Le"/>
+        <a:font script="Talu" typeface="Microsoft New Tai Lue"/>
+        <a:font script="Tfng" typeface="Ebrima"/>
+      </a:majorFont>
+      <a:minorFont>
+        <a:latin typeface="Calibri" panose="020F0502020204030204"/>
+        <a:ea typeface=""/>
+        <a:cs typeface=""/>
+        <a:font script="Jpan" typeface="游ゴシック"/>
+        <a:font script="Hang" typeface="맑은 고딕"/>
+        <a:font script="Hans" typeface="等线"/>
+        <a:font script="Hant" typeface="新細明體"/>
+        <a:font script="Arab" typeface="Arial"/>
+        <a:font script="Hebr" typeface="Arial"/>
+        <a:font script="Thai" typeface="Cordia New"/>
+        <a:font script="Ethi" typeface="Nyala"/>
+        <a:font script="Beng" typeface="Vrinda"/>
+        <a:font script="Gujr" typeface="Shruti"/>
+        <a:font script="Khmr" typeface="DaunPenh"/>
+        <a:font script="Knda" typeface="Tunga"/>
+        <a:font script="Guru" typeface="Raavi"/>
+        <a:font script="Cans" typeface="Euphemia"/>
+        <a:font script="Cher" typeface="Plantagenet Cherokee"/>
+        <a:font script="Yiii" typeface="Microsoft Yi Baiti"/>
+        <a:font script="Tibt" typeface="Microsoft Himalaya"/>
+        <a:font script="Thaa" typeface="MV Boli"/>
+        <a:font script="Deva" typeface="Mangal"/>
+        <a:font script="Telu" typeface="Gautami"/>
+        <a:font script="Taml" typeface="Latha"/>
+        <a:font script="Syrc" typeface="Estrangelo Edessa"/>
+        <a:font script="Orya" typeface="Kalinga"/>
+        <a:font script="Mlym" typeface="Kartika"/>
+        <a:font script="Laoo" typeface="DokChampa"/>
+        <a:font script="Sinh" typeface="Iskoola Pota"/>
+        <a:font script="Mong" typeface="Mongolian Baiti"/>
+        <a:font script="Viet" typeface="Arial"/>
+        <a:font script="Uigh" typeface="Microsoft Uighur"/>
+        <a:font script="Geor" typeface="Sylfaen"/>
+        <a:font script="Armn" typeface="Arial"/>
+        <a:font script="Bugi" typeface="Leelawadee UI"/>
+        <a:font script="Bopo" typeface="Microsoft JhengHei"/>
+        <a:font script="Java" typeface="Javanese Text"/>
+        <a:font script="Lisu" typeface="Segoe UI"/>
+        <a:font script="Mymr" typeface="Myanmar Text"/>
+        <a:font script="Nkoo" typeface="Ebrima"/>
+        <a:font script="Olck" typeface="Nirmala UI"/>
+        <a:font script="Osma" typeface="Ebrima"/>
+        <a:font script="Phag" typeface="Phagspa"/>
+        <a:font script="Syrn" typeface="Estrangelo Edessa"/>
+        <a:font script="Syrj" typeface="Estrangelo Edessa"/>
+        <a:font script="Syre" typeface="Estrangelo Edessa"/>
+        <a:font script="Sora" typeface="Nirmala UI"/>
+        <a:font script="Tale" typeface="Microsoft Tai Le"/>
+        <a:font script="Talu" typeface="Microsoft New Tai Lue"/>
+        <a:font script="Tfng" typeface="Ebrima"/>
+      </a:minorFont>
+    </a:fontScheme>
+    <a:fmtScheme name="Office">
+      <a:fillStyleLst>
+        <a:solidFill>
+          <a:schemeClr val="phClr"/>
+        </a:solidFill>
+        <a:gradFill rotWithShape="1">
+          <a:gsLst>
+            <a:gs pos="0">
+              <a:schemeClr val="phClr">
+                <a:lumMod val="110000"/>
+                <a:satMod val="105000"/>
+                <a:tint val="67000"/>
+              </a:schemeClr>
+            </a:gs>
+            <a:gs pos="50000">
+              <a:schemeClr val="phClr">
+                <a:lumMod val="105000"/>
+                <a:satMod val="103000"/>
+                <a:tint val="73000"/>
+              </a:schemeClr>
+            </a:gs>
+            <a:gs pos="100000">
+              <a:schemeClr val="phClr">
+                <a:lumMod val="105000"/>
+                <a:satMod val="109000"/>
+                <a:tint val="81000"/>
+              </a:schemeClr>
+            </a:gs>
+          </a:gsLst>
+          <a:lin ang="5400000" scaled="0"/>
+        </a:gradFill>
+        <a:gradFill rotWithShape="1">
+          <a:gsLst>
+            <a:gs pos="0">
+              <a:schemeClr val="phClr">
+                <a:satMod val="103000"/>
+                <a:lumMod val="102000"/>
+                <a:tint val="94000"/>
+              </a:schemeClr>
+            </a:gs>
+            <a:gs pos="50000">
+              <a:schemeClr val="phClr">
+                <a:satMod val="110000"/>
+                <a:lumMod val="100000"/>
+                <a:shade val="100000"/>
+              </a:schemeClr>
+            </a:gs>
+            <a:gs pos="100000">
+              <a:schemeClr val="phClr">
+                <a:lumMod val="99000"/>
+                <a:satMod val="120000"/>
+                <a:shade val="78000"/>
+              </a:schemeClr>
+            </a:gs>
+          </a:gsLst>
+          <a:lin ang="5400000" scaled="0"/>
+        </a:gradFill>
+      </a:fillStyleLst>
+      <a:lnStyleLst>
+        <a:ln w="6350" cap="flat" cmpd="sng" algn="ctr">
+          <a:solidFill>
+            <a:schemeClr val="phClr"/>
+          </a:solidFill>
+          <a:prstDash val="solid"/>
+          <a:miter lim="800000"/>
+        </a:ln>
+        <a:ln w="12700" cap="flat" cmpd="sng" algn="ctr">
+          <a:solidFill>
+            <a:schemeClr val="phClr"/>
+          </a:solidFill>
+          <a:prstDash val="solid"/>
+          <a:miter lim="800000"/>
+        </a:ln>
+        <a:ln w="19050" cap="flat" cmpd="sng" algn="ctr">
+          <a:solidFill>
+            <a:schemeClr val="phClr"/>
+          </a:solidFill>
+          <a:prstDash val="solid"/>
+          <a:miter lim="800000"/>
+        </a:ln>
+      </a:lnStyleLst>
+      <a:effectStyleLst>
+        <a:effectStyle>
+          <a:effectLst/>
+        </a:effectStyle>
+        <a:effectStyle>
+          <a:effectLst/>
+        </a:effectStyle>
+        <a:effectStyle>
+          <a:effectLst>
+            <a:outerShdw blurRad="57150" dist="19050" dir="5400000" algn="ctr" rotWithShape="0">
+              <a:srgbClr val="000000">
+                <a:alpha val="63000"/>
+              </a:srgbClr>
+            </a:outerShdw>
+          </a:effectLst>
+        </a:effectStyle>
+      </a:effectStyleLst>
+      <a:bgFillStyleLst>
+        <a:solidFill>
+          <a:schemeClr val="phClr"/>
+        </a:solidFill>
+        <a:solidFill>
+          <a:schemeClr val="phClr">
+            <a:tint val="95000"/>
+            <a:satMod val="170000"/>
+          </a:schemeClr>
+        </a:solidFill>
+        <a:gradFill rotWithShape="1">
+          <a:gsLst>
+            <a:gs pos="0">
+              <a:schemeClr val="phClr">
+                <a:tint val="93000"/>
+                <a:satMod val="150000"/>
+                <a:shade val="98000"/>
+                <a:lumMod val="102000"/>
+              </a:schemeClr>
+            </a:gs>
+            <a:gs pos="50000">
+              <a:schemeClr val="phClr">
+                <a:tint val="98000"/>
+                <a:satMod val="130000"/>
+                <a:shade val="90000"/>
+                <a:lumMod val="103000"/>
+              </a:schemeClr>
+            </a:gs>
+            <a:gs pos="100000">
+              <a:schemeClr val="phClr">
+                <a:shade val="63000"/>
+                <a:satMod val="120000"/>
+              </a:schemeClr>
+            </a:gs>
+          </a:gsLst>
+          <a:lin ang="5400000" scaled="0"/>
+        </a:gradFill>
+      </a:bgFillStyleLst>
+    </a:fmtScheme>
+  </a:themeElements>
+  <a:objectDefaults/>
+  <a:extraClrSchemeLst/>
+  <a:extLst>
+    <a:ext uri="{05A4C25C-085E-4340-85A3-A5531E510DB2}">
+      <thm15:themeFamily xmlns:thm15="http://schemas.microsoft.com/office/thememl/2012/main" name="Office Theme" id="{62F939B6-93AF-4DB8-9C6B-D6C7DFDC589F}" vid="{4A3C46E8-61CC-4603-A589-7422A47A8E4A}"/>
+    </a:ext>
+  </a:extLst>
+</a:theme>
 </file>